--- a/1. 일정/1. Weekly Plan/보고자료/프로젝트/연구소_주간업무_오세영_250903.pptx
+++ b/1. 일정/1. Weekly Plan/보고자료/프로젝트/연구소_주간업무_오세영_250903.pptx
@@ -27,7 +27,7 @@
   <p:notesSz cx="6802438" cy="9934575"/>
   <p:embeddedFontLst>
     <p:embeddedFont>
-      <p:font typeface="굴림" panose="020B0600000101010101" pitchFamily="34" charset="-127"/>
+      <p:font typeface="Lucida Sans Unicode" panose="020B0602030504020204" pitchFamily="34" charset="0"/>
       <p:regular r:id="rId15"/>
     </p:embeddedFont>
     <p:embeddedFont>
@@ -38,12 +38,12 @@
       <p:boldItalic r:id="rId19"/>
     </p:embeddedFont>
     <p:embeddedFont>
-      <p:font typeface="맑은 고딕" panose="020B0503020000020004" pitchFamily="34" charset="-127"/>
+      <p:font typeface="맑은 고딕" panose="020B0503020000020004" pitchFamily="50" charset="-127"/>
       <p:regular r:id="rId20"/>
       <p:bold r:id="rId21"/>
     </p:embeddedFont>
     <p:embeddedFont>
-      <p:font typeface="Lucida Sans Unicode" panose="020B0602030504020204" pitchFamily="34" charset="0"/>
+      <p:font typeface="굴림" panose="020B0600000101010101" pitchFamily="50" charset="-127"/>
       <p:regular r:id="rId22"/>
     </p:embeddedFont>
   </p:embeddedFontLst>
@@ -9721,7 +9721,7 @@
     <mc:Choice Requires="p14">
       <p:transition/>
     </mc:Choice>
-    <mc:Fallback xmlns="" xmlns:c="http://schemas.openxmlformats.org/drawingml/2006/chart" xmlns:dgm="http://schemas.openxmlformats.org/drawingml/2006/diagram" xmlns:dsp="http://schemas.microsoft.com/office/drawing/2008/diagram">
+    <mc:Fallback xmlns:dsp="http://schemas.microsoft.com/office/drawing/2008/diagram" xmlns:dgm="http://schemas.openxmlformats.org/drawingml/2006/diagram" xmlns:c="http://schemas.openxmlformats.org/drawingml/2006/chart" xmlns="">
       <p:transition/>
     </mc:Fallback>
   </mc:AlternateContent>
@@ -16153,7 +16153,7 @@
           <p:nvPr>
             <p:extLst>
               <p:ext uri="{D42A27DB-BD31-4B8C-83A1-F6EECF244321}">
-                <p14:modId xmlns:p14="http://schemas.microsoft.com/office/powerpoint/2010/main" val="2257815241"/>
+                <p14:modId xmlns:p14="http://schemas.microsoft.com/office/powerpoint/2010/main" val="3305106892"/>
               </p:ext>
             </p:extLst>
           </p:nvPr>
@@ -16851,7 +16851,7 @@
                         <a:defRPr/>
                       </a:pPr>
                       <a:r>
-                        <a:rPr kumimoji="1" lang="en-US" altLang="ko-KR" sz="1000" b="0" i="0" u="none" strike="noStrike" kern="1200" cap="none" normalizeH="0" baseline="0" smtClean="0">
+                        <a:rPr kumimoji="1" lang="en-US" altLang="ko-KR" sz="1000" b="0" i="0" u="none" strike="noStrike" kern="1200" cap="none" normalizeH="0" baseline="0" dirty="0" smtClean="0">
                           <a:ln>
                             <a:noFill/>
                           </a:ln>
@@ -16866,7 +16866,7 @@
                         <a:t>1. </a:t>
                       </a:r>
                       <a:r>
-                        <a:rPr kumimoji="1" lang="ko-KR" altLang="en-US" sz="1000" b="0" i="0" u="none" strike="noStrike" kern="1200" cap="none" normalizeH="0" baseline="0" smtClean="0">
+                        <a:rPr kumimoji="1" lang="ko-KR" altLang="en-US" sz="1000" b="0" i="0" u="none" strike="noStrike" kern="1200" cap="none" normalizeH="0" baseline="0" dirty="0" smtClean="0">
                           <a:ln>
                             <a:noFill/>
                           </a:ln>
@@ -16878,25 +16878,10 @@
                           <a:ea typeface="+mn-ea"/>
                           <a:cs typeface="+mn-cs"/>
                         </a:rPr>
-                        <a:t>최대 난방 및 좌우 편차 </a:t>
+                        <a:t>최대 난방 및 좌우 편차 대응 </a:t>
                       </a:r>
                       <a:r>
-                        <a:rPr kumimoji="1" lang="ko-KR" altLang="en-US" sz="1000" b="0" i="0" u="none" strike="noStrike" kern="1200" cap="none" normalizeH="0" baseline="0" smtClean="0">
-                          <a:ln>
-                            <a:noFill/>
-                          </a:ln>
-                          <a:solidFill>
-                            <a:schemeClr val="tx1"/>
-                          </a:solidFill>
-                          <a:effectLst/>
-                          <a:latin typeface="+mn-lt"/>
-                          <a:ea typeface="+mn-ea"/>
-                          <a:cs typeface="+mn-cs"/>
-                        </a:rPr>
-                        <a:t>대응 </a:t>
-                      </a:r>
-                      <a:r>
-                        <a:rPr kumimoji="1" lang="en-US" altLang="ko-KR" sz="1000" b="0" i="0" u="none" strike="noStrike" kern="1200" cap="none" normalizeH="0" baseline="0" smtClean="0">
+                        <a:rPr kumimoji="1" lang="en-US" altLang="ko-KR" sz="1000" b="0" i="0" u="none" strike="noStrike" kern="1200" cap="none" normalizeH="0" baseline="0" dirty="0" smtClean="0">
                           <a:ln>
                             <a:noFill/>
                           </a:ln>
@@ -16911,7 +16896,7 @@
                         <a:t>(</a:t>
                       </a:r>
                       <a:r>
-                        <a:rPr kumimoji="1" lang="ko-KR" altLang="en-US" sz="1000" b="0" i="0" u="none" strike="noStrike" kern="1200" cap="none" normalizeH="0" baseline="0" smtClean="0">
+                        <a:rPr kumimoji="1" lang="ko-KR" altLang="en-US" sz="1000" b="0" i="0" u="none" strike="noStrike" kern="1200" cap="none" normalizeH="0" baseline="0" dirty="0" err="1" smtClean="0">
                           <a:ln>
                             <a:noFill/>
                           </a:ln>
@@ -16926,7 +16911,7 @@
                         <a:t>항속형</a:t>
                       </a:r>
                       <a:r>
-                        <a:rPr kumimoji="1" lang="en-US" altLang="ko-KR" sz="1000" b="0" i="0" u="none" strike="noStrike" kern="1200" cap="none" normalizeH="0" baseline="0" smtClean="0">
+                        <a:rPr kumimoji="1" lang="en-US" altLang="ko-KR" sz="1000" b="0" i="0" u="none" strike="noStrike" kern="1200" cap="none" normalizeH="0" baseline="0" dirty="0" smtClean="0">
                           <a:ln>
                             <a:noFill/>
                           </a:ln>
@@ -16940,7 +16925,118 @@
                         </a:rPr>
                         <a:t>)</a:t>
                       </a:r>
-                      <a:endParaRPr kumimoji="1" lang="en-US" altLang="ko-KR" sz="1000" b="0" i="0" u="none" strike="noStrike" kern="1200" cap="none" normalizeH="0" baseline="0" smtClean="0">
+                    </a:p>
+                    <a:p>
+                      <a:pPr marL="0" marR="0" lvl="0" indent="0" algn="l" defTabSz="914400" rtl="0" eaLnBrk="1" fontAlgn="base" latinLnBrk="1" hangingPunct="1">
+                        <a:lnSpc>
+                          <a:spcPct val="100000"/>
+                        </a:lnSpc>
+                        <a:spcBef>
+                          <a:spcPct val="20000"/>
+                        </a:spcBef>
+                        <a:spcAft>
+                          <a:spcPct val="0"/>
+                        </a:spcAft>
+                        <a:buClr>
+                          <a:srgbClr val="FF0000"/>
+                        </a:buClr>
+                        <a:buSzTx/>
+                        <a:buFont typeface="Wingdings" pitchFamily="2" charset="2"/>
+                        <a:buNone/>
+                        <a:tabLst/>
+                        <a:defRPr/>
+                      </a:pPr>
+                      <a:r>
+                        <a:rPr kumimoji="1" lang="en-US" altLang="ko-KR" sz="1000" b="0" i="0" u="none" strike="noStrike" kern="1200" cap="none" normalizeH="0" baseline="0" dirty="0" smtClean="0">
+                          <a:ln>
+                            <a:noFill/>
+                          </a:ln>
+                          <a:solidFill>
+                            <a:schemeClr val="tx1"/>
+                          </a:solidFill>
+                          <a:effectLst/>
+                          <a:latin typeface="+mn-lt"/>
+                          <a:ea typeface="+mn-ea"/>
+                          <a:cs typeface="+mn-cs"/>
+                        </a:rPr>
+                        <a:t>   - </a:t>
+                      </a:r>
+                      <a:r>
+                        <a:rPr kumimoji="1" lang="ko-KR" altLang="en-US" sz="1000" b="0" i="0" u="none" strike="noStrike" kern="1200" cap="none" normalizeH="0" baseline="0" dirty="0" smtClean="0">
+                          <a:ln>
+                            <a:noFill/>
+                          </a:ln>
+                          <a:solidFill>
+                            <a:schemeClr val="tx1"/>
+                          </a:solidFill>
+                          <a:effectLst/>
+                          <a:latin typeface="+mn-lt"/>
+                          <a:ea typeface="+mn-ea"/>
+                          <a:cs typeface="+mn-cs"/>
+                        </a:rPr>
+                        <a:t>일정 </a:t>
+                      </a:r>
+                      <a:r>
+                        <a:rPr kumimoji="1" lang="en-US" altLang="ko-KR" sz="1000" b="0" i="0" u="none" strike="noStrike" kern="1200" cap="none" normalizeH="0" baseline="0" dirty="0" smtClean="0">
+                          <a:ln>
+                            <a:noFill/>
+                          </a:ln>
+                          <a:solidFill>
+                            <a:schemeClr val="tx1"/>
+                          </a:solidFill>
+                          <a:effectLst/>
+                          <a:latin typeface="+mn-lt"/>
+                          <a:ea typeface="+mn-ea"/>
+                          <a:cs typeface="+mn-cs"/>
+                        </a:rPr>
+                        <a:t>: 9</a:t>
+                      </a:r>
+                      <a:r>
+                        <a:rPr kumimoji="1" lang="ko-KR" altLang="en-US" sz="1000" b="0" i="0" u="none" strike="noStrike" kern="1200" cap="none" normalizeH="0" baseline="0" dirty="0" smtClean="0">
+                          <a:ln>
+                            <a:noFill/>
+                          </a:ln>
+                          <a:solidFill>
+                            <a:schemeClr val="tx1"/>
+                          </a:solidFill>
+                          <a:effectLst/>
+                          <a:latin typeface="+mn-lt"/>
+                          <a:ea typeface="+mn-ea"/>
+                          <a:cs typeface="+mn-cs"/>
+                        </a:rPr>
+                        <a:t>월 </a:t>
+                      </a:r>
+                      <a:r>
+                        <a:rPr kumimoji="1" lang="en-US" altLang="ko-KR" sz="1000" b="0" i="0" u="none" strike="noStrike" kern="1200" cap="none" normalizeH="0" baseline="0" dirty="0" smtClean="0">
+                          <a:ln>
+                            <a:noFill/>
+                          </a:ln>
+                          <a:solidFill>
+                            <a:schemeClr val="tx1"/>
+                          </a:solidFill>
+                          <a:effectLst/>
+                          <a:latin typeface="+mn-lt"/>
+                          <a:ea typeface="+mn-ea"/>
+                          <a:cs typeface="+mn-cs"/>
+                        </a:rPr>
+                        <a:t>2</a:t>
+                      </a:r>
+                      <a:r>
+                        <a:rPr kumimoji="1" lang="ko-KR" altLang="en-US" sz="1000" b="0" i="0" u="none" strike="noStrike" kern="1200" cap="none" normalizeH="0" baseline="0" dirty="0" smtClean="0">
+                          <a:ln>
+                            <a:noFill/>
+                          </a:ln>
+                          <a:solidFill>
+                            <a:schemeClr val="tx1"/>
+                          </a:solidFill>
+                          <a:effectLst/>
+                          <a:latin typeface="+mn-lt"/>
+                          <a:ea typeface="+mn-ea"/>
+                          <a:cs typeface="+mn-cs"/>
+                        </a:rPr>
+                        <a:t>주차 시험 예정</a:t>
+                      </a:r>
+                      <a:endParaRPr kumimoji="1" lang="en-US" altLang="ko-KR" sz="1000" b="0" i="0" u="none" strike="noStrike" kern="1200" cap="none" normalizeH="0" baseline="0" dirty="0" smtClean="0">
                         <a:ln>
                           <a:noFill/>
                         </a:ln>
@@ -16974,7 +17070,7 @@
                         <a:defRPr/>
                       </a:pPr>
                       <a:r>
-                        <a:rPr kumimoji="1" lang="en-US" altLang="ko-KR" sz="1000" b="0" i="0" u="none" strike="noStrike" kern="1200" cap="none" normalizeH="0" baseline="0" smtClean="0">
+                        <a:rPr kumimoji="1" lang="ko-KR" altLang="en-US" sz="1000" b="0" i="0" u="none" strike="noStrike" kern="1200" cap="none" normalizeH="0" baseline="0" dirty="0" smtClean="0">
                           <a:ln>
                             <a:noFill/>
                           </a:ln>
@@ -16986,10 +17082,10 @@
                           <a:ea typeface="+mn-ea"/>
                           <a:cs typeface="+mn-cs"/>
                         </a:rPr>
-                        <a:t>   - </a:t>
+                        <a:t>   </a:t>
                       </a:r>
                       <a:r>
-                        <a:rPr kumimoji="1" lang="ko-KR" altLang="en-US" sz="1000" b="0" i="0" u="none" strike="noStrike" kern="1200" cap="none" normalizeH="0" baseline="0" smtClean="0">
+                        <a:rPr kumimoji="1" lang="en-US" altLang="ko-KR" sz="1000" b="0" i="0" u="none" strike="noStrike" kern="1200" cap="none" normalizeH="0" baseline="0" dirty="0" smtClean="0">
                           <a:ln>
                             <a:noFill/>
                           </a:ln>
@@ -17001,10 +17097,10 @@
                           <a:ea typeface="+mn-ea"/>
                           <a:cs typeface="+mn-cs"/>
                         </a:rPr>
-                        <a:t>일정 </a:t>
+                        <a:t>- </a:t>
                       </a:r>
                       <a:r>
-                        <a:rPr kumimoji="1" lang="en-US" altLang="ko-KR" sz="1000" b="0" i="0" u="none" strike="noStrike" kern="1200" cap="none" normalizeH="0" baseline="0" smtClean="0">
+                        <a:rPr kumimoji="1" lang="ko-KR" altLang="en-US" sz="1000" b="0" i="0" u="none" strike="noStrike" kern="1200" cap="none" normalizeH="0" baseline="0" dirty="0" smtClean="0">
                           <a:ln>
                             <a:noFill/>
                           </a:ln>
@@ -17016,10 +17112,10 @@
                           <a:ea typeface="+mn-ea"/>
                           <a:cs typeface="+mn-cs"/>
                         </a:rPr>
-                        <a:t>: 9</a:t>
+                        <a:t>장소 </a:t>
                       </a:r>
                       <a:r>
-                        <a:rPr kumimoji="1" lang="ko-KR" altLang="en-US" sz="1000" b="0" i="0" u="none" strike="noStrike" kern="1200" cap="none" normalizeH="0" baseline="0" smtClean="0">
+                        <a:rPr kumimoji="1" lang="en-US" altLang="ko-KR" sz="1000" b="0" i="0" u="none" strike="noStrike" kern="1200" cap="none" normalizeH="0" baseline="0" dirty="0" smtClean="0">
                           <a:ln>
                             <a:noFill/>
                           </a:ln>
@@ -17031,10 +17127,10 @@
                           <a:ea typeface="+mn-ea"/>
                           <a:cs typeface="+mn-cs"/>
                         </a:rPr>
-                        <a:t>월 </a:t>
+                        <a:t>: </a:t>
                       </a:r>
                       <a:r>
-                        <a:rPr kumimoji="1" lang="en-US" altLang="ko-KR" sz="1000" b="0" i="0" u="none" strike="noStrike" kern="1200" cap="none" normalizeH="0" baseline="0" smtClean="0">
+                        <a:rPr kumimoji="1" lang="ko-KR" altLang="en-US" sz="1000" b="0" i="0" u="none" strike="noStrike" kern="1200" cap="none" normalizeH="0" baseline="0" dirty="0" smtClean="0">
                           <a:ln>
                             <a:noFill/>
                           </a:ln>
@@ -17046,10 +17142,10 @@
                           <a:ea typeface="+mn-ea"/>
                           <a:cs typeface="+mn-cs"/>
                         </a:rPr>
-                        <a:t>2</a:t>
+                        <a:t>현대 남양 연구소 에너지 </a:t>
                       </a:r>
                       <a:r>
-                        <a:rPr kumimoji="1" lang="ko-KR" altLang="en-US" sz="1000" b="0" i="0" u="none" strike="noStrike" kern="1200" cap="none" normalizeH="0" baseline="0" smtClean="0">
+                        <a:rPr kumimoji="1" lang="ko-KR" altLang="en-US" sz="1000" b="0" i="0" u="none" strike="noStrike" kern="1200" cap="none" normalizeH="0" baseline="0" dirty="0" err="1" smtClean="0">
                           <a:ln>
                             <a:noFill/>
                           </a:ln>
@@ -17061,9 +17157,9 @@
                           <a:ea typeface="+mn-ea"/>
                           <a:cs typeface="+mn-cs"/>
                         </a:rPr>
-                        <a:t>주차 시험 예정</a:t>
+                        <a:t>시험팀</a:t>
                       </a:r>
-                      <a:endParaRPr kumimoji="1" lang="en-US" altLang="ko-KR" sz="1000" b="0" i="0" u="none" strike="noStrike" kern="1200" cap="none" normalizeH="0" baseline="0" smtClean="0">
+                      <a:endParaRPr kumimoji="1" lang="en-US" altLang="ko-KR" sz="1000" b="0" i="0" u="none" strike="noStrike" kern="1200" cap="none" normalizeH="0" baseline="0" dirty="0" smtClean="0">
                         <a:ln>
                           <a:noFill/>
                         </a:ln>
@@ -17097,7 +17193,7 @@
                         <a:defRPr/>
                       </a:pPr>
                       <a:r>
-                        <a:rPr kumimoji="1" lang="ko-KR" altLang="en-US" sz="1000" b="0" i="0" u="none" strike="noStrike" kern="1200" cap="none" normalizeH="0" baseline="0" smtClean="0">
+                        <a:rPr kumimoji="1" lang="en-US" altLang="ko-KR" sz="1000" b="0" i="0" u="none" strike="noStrike" kern="1200" cap="none" normalizeH="0" baseline="0" dirty="0" smtClean="0">
                           <a:ln>
                             <a:noFill/>
                           </a:ln>
@@ -17109,10 +17205,10 @@
                           <a:ea typeface="+mn-ea"/>
                           <a:cs typeface="+mn-cs"/>
                         </a:rPr>
-                        <a:t>   </a:t>
+                        <a:t>            </a:t>
                       </a:r>
                       <a:r>
-                        <a:rPr kumimoji="1" lang="en-US" altLang="ko-KR" sz="1000" b="0" i="0" u="none" strike="noStrike" kern="1200" cap="none" normalizeH="0" baseline="0" smtClean="0">
+                        <a:rPr kumimoji="1" lang="ko-KR" altLang="en-US" sz="1000" b="0" i="0" u="none" strike="noStrike" kern="1200" cap="none" normalizeH="0" baseline="0" dirty="0" smtClean="0">
                           <a:ln>
                             <a:noFill/>
                           </a:ln>
@@ -17124,10 +17220,10 @@
                           <a:ea typeface="+mn-ea"/>
                           <a:cs typeface="+mn-cs"/>
                         </a:rPr>
-                        <a:t>- </a:t>
+                        <a:t> </a:t>
                       </a:r>
                       <a:r>
-                        <a:rPr kumimoji="1" lang="ko-KR" altLang="en-US" sz="1000" b="0" i="0" u="none" strike="noStrike" kern="1200" cap="none" normalizeH="0" baseline="0" smtClean="0">
+                        <a:rPr kumimoji="1" lang="ko-KR" altLang="en-US" sz="1000" b="0" i="0" u="none" strike="noStrike" kern="1200" cap="none" normalizeH="0" baseline="0" dirty="0" err="1" smtClean="0">
                           <a:ln>
                             <a:noFill/>
                           </a:ln>
@@ -17139,10 +17235,10 @@
                           <a:ea typeface="+mn-ea"/>
                           <a:cs typeface="+mn-cs"/>
                         </a:rPr>
-                        <a:t>장소 </a:t>
+                        <a:t>실차</a:t>
                       </a:r>
                       <a:r>
-                        <a:rPr kumimoji="1" lang="en-US" altLang="ko-KR" sz="1000" b="0" i="0" u="none" strike="noStrike" kern="1200" cap="none" normalizeH="0" baseline="0" smtClean="0">
+                        <a:rPr kumimoji="1" lang="ko-KR" altLang="en-US" sz="1000" b="0" i="0" u="none" strike="noStrike" kern="1200" cap="none" normalizeH="0" baseline="0" dirty="0" smtClean="0">
                           <a:ln>
                             <a:noFill/>
                           </a:ln>
@@ -17154,10 +17250,10 @@
                           <a:ea typeface="+mn-ea"/>
                           <a:cs typeface="+mn-cs"/>
                         </a:rPr>
-                        <a:t>: </a:t>
+                        <a:t> </a:t>
                       </a:r>
                       <a:r>
-                        <a:rPr kumimoji="1" lang="ko-KR" altLang="en-US" sz="1000" b="0" i="0" u="none" strike="noStrike" kern="1200" cap="none" normalizeH="0" baseline="0" smtClean="0">
+                        <a:rPr kumimoji="1" lang="ko-KR" altLang="en-US" sz="1000" b="0" i="0" u="none" strike="noStrike" kern="1200" cap="none" normalizeH="0" baseline="0" dirty="0" err="1" smtClean="0">
                           <a:ln>
                             <a:noFill/>
                           </a:ln>
@@ -17169,9 +17265,42 @@
                           <a:ea typeface="+mn-ea"/>
                           <a:cs typeface="+mn-cs"/>
                         </a:rPr>
-                        <a:t>현대 남양 연구소 에너지 시험팀</a:t>
+                        <a:t>챔버</a:t>
                       </a:r>
-                      <a:endParaRPr kumimoji="1" lang="en-US" altLang="ko-KR" sz="1000" b="0" i="0" u="none" strike="noStrike" kern="1200" cap="none" normalizeH="0" baseline="0" smtClean="0">
+                      <a:endParaRPr kumimoji="1" lang="en-US" altLang="ko-KR" sz="1000" b="0" i="0" u="none" strike="noStrike" kern="1200" cap="none" normalizeH="0" baseline="0" dirty="0" smtClean="0">
+                        <a:ln>
+                          <a:noFill/>
+                        </a:ln>
+                        <a:solidFill>
+                          <a:schemeClr val="tx1"/>
+                        </a:solidFill>
+                        <a:effectLst/>
+                        <a:latin typeface="+mn-lt"/>
+                        <a:ea typeface="+mn-ea"/>
+                        <a:cs typeface="+mn-cs"/>
+                      </a:endParaRPr>
+                    </a:p>
+                    <a:p>
+                      <a:pPr marL="0" marR="0" lvl="0" indent="0" algn="l" defTabSz="914400" rtl="0" eaLnBrk="1" fontAlgn="base" latinLnBrk="1" hangingPunct="1">
+                        <a:lnSpc>
+                          <a:spcPct val="100000"/>
+                        </a:lnSpc>
+                        <a:spcBef>
+                          <a:spcPct val="20000"/>
+                        </a:spcBef>
+                        <a:spcAft>
+                          <a:spcPct val="0"/>
+                        </a:spcAft>
+                        <a:buClr>
+                          <a:srgbClr val="FF0000"/>
+                        </a:buClr>
+                        <a:buSzTx/>
+                        <a:buFont typeface="Wingdings" pitchFamily="2" charset="2"/>
+                        <a:buNone/>
+                        <a:tabLst/>
+                        <a:defRPr/>
+                      </a:pPr>
+                      <a:endParaRPr kumimoji="1" lang="en-US" altLang="ko-KR" sz="1000" b="0" i="0" u="none" strike="noStrike" kern="1200" cap="none" normalizeH="0" baseline="0" dirty="0" smtClean="0">
                         <a:ln>
                           <a:noFill/>
                         </a:ln>
@@ -17205,103 +17334,7 @@
                         <a:defRPr/>
                       </a:pPr>
                       <a:r>
-                        <a:rPr kumimoji="1" lang="en-US" altLang="ko-KR" sz="1000" b="0" i="0" u="none" strike="noStrike" kern="1200" cap="none" normalizeH="0" baseline="0" smtClean="0">
-                          <a:ln>
-                            <a:noFill/>
-                          </a:ln>
-                          <a:solidFill>
-                            <a:schemeClr val="tx1"/>
-                          </a:solidFill>
-                          <a:effectLst/>
-                          <a:latin typeface="+mn-lt"/>
-                          <a:ea typeface="+mn-ea"/>
-                          <a:cs typeface="+mn-cs"/>
-                        </a:rPr>
-                        <a:t>            </a:t>
-                      </a:r>
-                      <a:r>
-                        <a:rPr kumimoji="1" lang="ko-KR" altLang="en-US" sz="1000" b="0" i="0" u="none" strike="noStrike" kern="1200" cap="none" normalizeH="0" baseline="0" smtClean="0">
-                          <a:ln>
-                            <a:noFill/>
-                          </a:ln>
-                          <a:solidFill>
-                            <a:schemeClr val="tx1"/>
-                          </a:solidFill>
-                          <a:effectLst/>
-                          <a:latin typeface="+mn-lt"/>
-                          <a:ea typeface="+mn-ea"/>
-                          <a:cs typeface="+mn-cs"/>
-                        </a:rPr>
-                        <a:t> 실차 챔버</a:t>
-                      </a:r>
-                      <a:endParaRPr kumimoji="1" lang="en-US" altLang="ko-KR" sz="1000" b="0" i="0" u="none" strike="noStrike" kern="1200" cap="none" normalizeH="0" baseline="0" smtClean="0">
-                        <a:ln>
-                          <a:noFill/>
-                        </a:ln>
-                        <a:solidFill>
-                          <a:schemeClr val="tx1"/>
-                        </a:solidFill>
-                        <a:effectLst/>
-                        <a:latin typeface="+mn-lt"/>
-                        <a:ea typeface="+mn-ea"/>
-                        <a:cs typeface="+mn-cs"/>
-                      </a:endParaRPr>
-                    </a:p>
-                    <a:p>
-                      <a:pPr marL="0" marR="0" lvl="0" indent="0" algn="l" defTabSz="914400" rtl="0" eaLnBrk="1" fontAlgn="base" latinLnBrk="1" hangingPunct="1">
-                        <a:lnSpc>
-                          <a:spcPct val="100000"/>
-                        </a:lnSpc>
-                        <a:spcBef>
-                          <a:spcPct val="20000"/>
-                        </a:spcBef>
-                        <a:spcAft>
-                          <a:spcPct val="0"/>
-                        </a:spcAft>
-                        <a:buClr>
-                          <a:srgbClr val="FF0000"/>
-                        </a:buClr>
-                        <a:buSzTx/>
-                        <a:buFont typeface="Wingdings" pitchFamily="2" charset="2"/>
-                        <a:buNone/>
-                        <a:tabLst/>
-                        <a:defRPr/>
-                      </a:pPr>
-                      <a:endParaRPr kumimoji="1" lang="en-US" altLang="ko-KR" sz="1000" b="0" i="0" u="none" strike="noStrike" kern="1200" cap="none" normalizeH="0" baseline="0" smtClean="0">
-                        <a:ln>
-                          <a:noFill/>
-                        </a:ln>
-                        <a:solidFill>
-                          <a:schemeClr val="tx1"/>
-                        </a:solidFill>
-                        <a:effectLst/>
-                        <a:latin typeface="+mn-lt"/>
-                        <a:ea typeface="+mn-ea"/>
-                        <a:cs typeface="+mn-cs"/>
-                      </a:endParaRPr>
-                    </a:p>
-                    <a:p>
-                      <a:pPr marL="0" marR="0" lvl="0" indent="0" algn="l" defTabSz="914400" rtl="0" eaLnBrk="1" fontAlgn="base" latinLnBrk="1" hangingPunct="1">
-                        <a:lnSpc>
-                          <a:spcPct val="100000"/>
-                        </a:lnSpc>
-                        <a:spcBef>
-                          <a:spcPct val="20000"/>
-                        </a:spcBef>
-                        <a:spcAft>
-                          <a:spcPct val="0"/>
-                        </a:spcAft>
-                        <a:buClr>
-                          <a:srgbClr val="FF0000"/>
-                        </a:buClr>
-                        <a:buSzTx/>
-                        <a:buFont typeface="Wingdings" pitchFamily="2" charset="2"/>
-                        <a:buNone/>
-                        <a:tabLst/>
-                        <a:defRPr/>
-                      </a:pPr>
-                      <a:r>
-                        <a:rPr kumimoji="1" lang="en-US" altLang="ko-KR" sz="1000" b="0" i="0" u="none" strike="noStrike" kern="1200" cap="none" normalizeH="0" baseline="0" smtClean="0">
+                        <a:rPr kumimoji="1" lang="en-US" altLang="ko-KR" sz="1000" b="0" i="0" u="none" strike="noStrike" kern="1200" cap="none" normalizeH="0" baseline="0" dirty="0" smtClean="0">
                           <a:ln>
                             <a:noFill/>
                           </a:ln>
@@ -17316,7 +17349,7 @@
                         <a:t>2. </a:t>
                       </a:r>
                       <a:r>
-                        <a:rPr kumimoji="1" lang="ko-KR" altLang="en-US" sz="1000" b="0" i="0" u="none" strike="noStrike" kern="1200" cap="none" normalizeH="0" baseline="0" smtClean="0">
+                        <a:rPr kumimoji="1" lang="ko-KR" altLang="en-US" sz="1000" b="0" i="0" u="none" strike="noStrike" kern="1200" cap="none" normalizeH="0" baseline="0" dirty="0" smtClean="0">
                           <a:ln>
                             <a:noFill/>
                           </a:ln>
@@ -17331,7 +17364,7 @@
                         <a:t>기본형 </a:t>
                       </a:r>
                       <a:r>
-                        <a:rPr kumimoji="1" lang="en-US" altLang="ko-KR" sz="1000" b="0" i="0" u="none" strike="noStrike" kern="1200" cap="none" normalizeH="0" baseline="0" smtClean="0">
+                        <a:rPr kumimoji="1" lang="en-US" altLang="ko-KR" sz="1000" b="0" i="0" u="none" strike="noStrike" kern="1200" cap="none" normalizeH="0" baseline="0" dirty="0" smtClean="0">
                           <a:ln>
                             <a:noFill/>
                           </a:ln>
@@ -17346,7 +17379,7 @@
                         <a:t>LP2 </a:t>
                       </a:r>
                       <a:r>
-                        <a:rPr kumimoji="1" lang="ko-KR" altLang="en-US" sz="1000" b="0" i="0" u="none" strike="noStrike" kern="1200" cap="none" normalizeH="0" baseline="0" smtClean="0">
+                        <a:rPr kumimoji="1" lang="ko-KR" altLang="en-US" sz="1000" b="0" i="0" u="none" strike="noStrike" kern="1200" cap="none" normalizeH="0" baseline="0" dirty="0" smtClean="0">
                           <a:ln>
                             <a:noFill/>
                           </a:ln>
@@ -17361,7 +17394,7 @@
                         <a:t>대응 위한 </a:t>
                       </a:r>
                       <a:r>
-                        <a:rPr kumimoji="1" lang="en-US" altLang="ko-KR" sz="1000" b="0" i="0" u="none" strike="noStrike" kern="1200" cap="none" normalizeH="0" baseline="0" smtClean="0">
+                        <a:rPr kumimoji="1" lang="en-US" altLang="ko-KR" sz="1000" b="0" i="0" u="none" strike="noStrike" kern="1200" cap="none" normalizeH="0" baseline="0" dirty="0" smtClean="0">
                           <a:ln>
                             <a:noFill/>
                           </a:ln>
@@ -17376,7 +17409,7 @@
                         <a:t>S/W </a:t>
                       </a:r>
                       <a:r>
-                        <a:rPr kumimoji="1" lang="ko-KR" altLang="en-US" sz="1000" b="0" i="0" u="none" strike="noStrike" kern="1200" cap="none" normalizeH="0" baseline="0" smtClean="0">
+                        <a:rPr kumimoji="1" lang="ko-KR" altLang="en-US" sz="1000" b="0" i="0" u="none" strike="noStrike" kern="1200" cap="none" normalizeH="0" baseline="0" dirty="0" smtClean="0">
                           <a:ln>
                             <a:noFill/>
                           </a:ln>
@@ -17391,7 +17424,7 @@
                         <a:t>시험 진행 중 </a:t>
                       </a:r>
                       <a:r>
-                        <a:rPr kumimoji="1" lang="en-US" altLang="ko-KR" sz="1000" b="0" i="0" u="none" strike="noStrike" kern="1200" cap="none" normalizeH="0" baseline="0" smtClean="0">
+                        <a:rPr kumimoji="1" lang="en-US" altLang="ko-KR" sz="1000" b="0" i="0" u="none" strike="noStrike" kern="1200" cap="none" normalizeH="0" baseline="0" dirty="0" smtClean="0">
                           <a:ln>
                             <a:noFill/>
                           </a:ln>
@@ -17427,7 +17460,7 @@
                         <a:defRPr/>
                       </a:pPr>
                       <a:r>
-                        <a:rPr kumimoji="1" lang="en-US" altLang="ko-KR" sz="1000" b="0" i="0" u="none" strike="noStrike" kern="1200" cap="none" normalizeH="0" baseline="0" smtClean="0">
+                        <a:rPr kumimoji="1" lang="en-US" altLang="ko-KR" sz="1000" b="0" i="0" u="none" strike="noStrike" kern="1200" cap="none" normalizeH="0" baseline="0" dirty="0" smtClean="0">
                           <a:ln>
                             <a:noFill/>
                           </a:ln>
@@ -17442,7 +17475,7 @@
                         <a:t>   - R</a:t>
                       </a:r>
                       <a:r>
-                        <a:rPr kumimoji="1" lang="ko-KR" altLang="en-US" sz="1000" b="0" i="0" u="none" strike="noStrike" kern="1200" cap="none" normalizeH="0" baseline="0" smtClean="0">
+                        <a:rPr kumimoji="1" lang="ko-KR" altLang="en-US" sz="1000" b="0" i="0" u="none" strike="noStrike" kern="1200" cap="none" normalizeH="0" baseline="0" dirty="0" err="1" smtClean="0">
                           <a:ln>
                             <a:noFill/>
                           </a:ln>
@@ -17454,9 +17487,24 @@
                           <a:ea typeface="+mn-ea"/>
                           <a:cs typeface="+mn-cs"/>
                         </a:rPr>
-                        <a:t>로직 튜닝 진행 중</a:t>
+                        <a:t>로직</a:t>
                       </a:r>
-                      <a:endParaRPr kumimoji="1" lang="en-US" altLang="ko-KR" sz="1000" b="0" i="0" u="none" strike="noStrike" kern="1200" cap="none" normalizeH="0" baseline="0" smtClean="0">
+                      <a:r>
+                        <a:rPr kumimoji="1" lang="ko-KR" altLang="en-US" sz="1000" b="0" i="0" u="none" strike="noStrike" kern="1200" cap="none" normalizeH="0" baseline="0" dirty="0" smtClean="0">
+                          <a:ln>
+                            <a:noFill/>
+                          </a:ln>
+                          <a:solidFill>
+                            <a:schemeClr val="tx1"/>
+                          </a:solidFill>
+                          <a:effectLst/>
+                          <a:latin typeface="+mn-lt"/>
+                          <a:ea typeface="+mn-ea"/>
+                          <a:cs typeface="+mn-cs"/>
+                        </a:rPr>
+                        <a:t> 튜닝 진행 중</a:t>
+                      </a:r>
+                      <a:endParaRPr kumimoji="1" lang="en-US" altLang="ko-KR" sz="1000" b="0" i="0" u="none" strike="noStrike" kern="1200" cap="none" normalizeH="0" baseline="0" dirty="0" smtClean="0">
                         <a:ln>
                           <a:noFill/>
                         </a:ln>
@@ -17490,7 +17538,7 @@
                         <a:defRPr/>
                       </a:pPr>
                       <a:r>
-                        <a:rPr kumimoji="1" lang="en-US" altLang="ko-KR" sz="1000" b="0" i="0" u="none" strike="noStrike" kern="1200" cap="none" normalizeH="0" baseline="0" smtClean="0">
+                        <a:rPr kumimoji="1" lang="en-US" altLang="ko-KR" sz="1000" b="0" i="0" u="none" strike="noStrike" kern="1200" cap="none" normalizeH="0" baseline="0" dirty="0" smtClean="0">
                           <a:ln>
                             <a:noFill/>
                           </a:ln>
@@ -17505,7 +17553,7 @@
                         <a:t>   - </a:t>
                       </a:r>
                       <a:r>
-                        <a:rPr kumimoji="1" lang="ko-KR" altLang="en-US" sz="1000" b="0" i="0" u="none" strike="noStrike" kern="1200" cap="none" normalizeH="0" baseline="0" smtClean="0">
+                        <a:rPr kumimoji="1" lang="ko-KR" altLang="en-US" sz="1000" b="0" i="0" u="none" strike="noStrike" kern="1200" cap="none" normalizeH="0" baseline="0" dirty="0" err="1" smtClean="0">
                           <a:ln>
                             <a:noFill/>
                           </a:ln>
@@ -17517,10 +17565,25 @@
                           <a:ea typeface="+mn-ea"/>
                           <a:cs typeface="+mn-cs"/>
                         </a:rPr>
-                        <a:t>로직 체크리스트에 따른 시험 진행</a:t>
+                        <a:t>로직</a:t>
                       </a:r>
                       <a:r>
-                        <a:rPr kumimoji="1" lang="en-US" altLang="ko-KR" sz="1000" b="0" i="0" u="none" strike="noStrike" kern="1200" cap="none" normalizeH="0" baseline="0" smtClean="0">
+                        <a:rPr kumimoji="1" lang="ko-KR" altLang="en-US" sz="1000" b="0" i="0" u="none" strike="noStrike" kern="1200" cap="none" normalizeH="0" baseline="0" dirty="0" smtClean="0">
+                          <a:ln>
+                            <a:noFill/>
+                          </a:ln>
+                          <a:solidFill>
+                            <a:schemeClr val="tx1"/>
+                          </a:solidFill>
+                          <a:effectLst/>
+                          <a:latin typeface="+mn-lt"/>
+                          <a:ea typeface="+mn-ea"/>
+                          <a:cs typeface="+mn-cs"/>
+                        </a:rPr>
+                        <a:t> 체크리스트에 따른 시험 진행</a:t>
+                      </a:r>
+                      <a:r>
+                        <a:rPr kumimoji="1" lang="en-US" altLang="ko-KR" sz="1000" b="0" i="0" u="none" strike="noStrike" kern="1200" cap="none" normalizeH="0" baseline="0" dirty="0" smtClean="0">
                           <a:ln>
                             <a:noFill/>
                           </a:ln>
@@ -17556,7 +17619,7 @@
                         <a:defRPr/>
                       </a:pPr>
                       <a:r>
-                        <a:rPr kumimoji="1" lang="en-US" altLang="ko-KR" sz="1000" b="0" i="0" u="none" strike="noStrike" kern="1200" cap="none" normalizeH="0" baseline="0" smtClean="0">
+                        <a:rPr kumimoji="1" lang="en-US" altLang="ko-KR" sz="1000" b="0" i="0" u="none" strike="noStrike" kern="1200" cap="none" normalizeH="0" baseline="0" dirty="0" smtClean="0">
                           <a:ln>
                             <a:noFill/>
                           </a:ln>
@@ -17571,7 +17634,7 @@
                         <a:t>   - </a:t>
                       </a:r>
                       <a:r>
-                        <a:rPr kumimoji="1" lang="ko-KR" altLang="en-US" sz="1000" b="0" i="0" u="none" strike="noStrike" kern="1200" cap="none" normalizeH="0" baseline="0" smtClean="0">
+                        <a:rPr kumimoji="1" lang="ko-KR" altLang="en-US" sz="1000" b="0" i="0" u="none" strike="noStrike" kern="1200" cap="none" normalizeH="0" baseline="0" dirty="0" smtClean="0">
                           <a:ln>
                             <a:noFill/>
                           </a:ln>
@@ -17586,7 +17649,7 @@
                         <a:t>설계변경 진행 </a:t>
                       </a:r>
                       <a:r>
-                        <a:rPr kumimoji="1" lang="en-US" altLang="ko-KR" sz="1000" b="0" i="0" u="none" strike="noStrike" kern="1200" cap="none" normalizeH="0" baseline="0" smtClean="0">
+                        <a:rPr kumimoji="1" lang="en-US" altLang="ko-KR" sz="1000" b="0" i="0" u="none" strike="noStrike" kern="1200" cap="none" normalizeH="0" baseline="0" dirty="0" smtClean="0">
                           <a:ln>
                             <a:noFill/>
                           </a:ln>
@@ -17601,7 +17664,7 @@
                         <a:t>(9/10</a:t>
                       </a:r>
                       <a:r>
-                        <a:rPr kumimoji="1" lang="ko-KR" altLang="en-US" sz="1000" b="0" i="0" u="none" strike="noStrike" kern="1200" cap="none" normalizeH="0" baseline="0" smtClean="0">
+                        <a:rPr kumimoji="1" lang="ko-KR" altLang="en-US" sz="1000" b="0" i="0" u="none" strike="noStrike" kern="1200" cap="none" normalizeH="0" baseline="0" dirty="0" smtClean="0">
                           <a:ln>
                             <a:noFill/>
                           </a:ln>
@@ -17616,7 +17679,7 @@
                         <a:t>일</a:t>
                       </a:r>
                       <a:r>
-                        <a:rPr kumimoji="1" lang="en-US" altLang="ko-KR" sz="1000" b="0" i="0" u="none" strike="noStrike" kern="1200" cap="none" normalizeH="0" baseline="0" smtClean="0">
+                        <a:rPr kumimoji="1" lang="en-US" altLang="ko-KR" sz="1000" b="0" i="0" u="none" strike="noStrike" kern="1200" cap="none" normalizeH="0" baseline="0" dirty="0" smtClean="0">
                           <a:ln>
                             <a:noFill/>
                           </a:ln>
@@ -17685,21 +17748,6 @@
                         <a:defRPr/>
                       </a:pPr>
                       <a:r>
-                        <a:rPr kumimoji="1" lang="en-US" altLang="ko-KR" sz="1000" b="0" i="0" u="none" strike="noStrike" kern="1200" cap="none" normalizeH="0" baseline="0" smtClean="0">
-                          <a:ln>
-                            <a:noFill/>
-                          </a:ln>
-                          <a:solidFill>
-                            <a:schemeClr val="tx1"/>
-                          </a:solidFill>
-                          <a:effectLst/>
-                          <a:latin typeface="+mn-lt"/>
-                          <a:ea typeface="+mn-ea"/>
-                          <a:cs typeface="+mn-cs"/>
-                        </a:rPr>
-                        <a:t>3. </a:t>
-                      </a:r>
-                      <a:r>
                         <a:rPr kumimoji="1" lang="en-US" altLang="ko-KR" sz="1000" b="0" i="0" u="none" strike="noStrike" kern="1200" cap="none" normalizeH="0" baseline="0" dirty="0" smtClean="0">
                           <a:ln>
                             <a:noFill/>
@@ -17712,7 +17760,7 @@
                           <a:ea typeface="+mn-ea"/>
                           <a:cs typeface="+mn-cs"/>
                         </a:rPr>
-                        <a:t>SPQA </a:t>
+                        <a:t>3. SPQA </a:t>
                       </a:r>
                       <a:r>
                         <a:rPr kumimoji="1" lang="ko-KR" altLang="en-US" sz="1000" b="0" i="0" u="none" strike="noStrike" kern="1200" cap="none" normalizeH="0" baseline="0" dirty="0" smtClean="0">
@@ -17763,7 +17811,7 @@
                         <a:defRPr/>
                       </a:pPr>
                       <a:r>
-                        <a:rPr kumimoji="1" lang="en-US" altLang="ko-KR" sz="1000" b="0" i="0" u="none" strike="noStrike" kern="1200" cap="none" normalizeH="0" baseline="0" smtClean="0">
+                        <a:rPr kumimoji="1" lang="en-US" altLang="ko-KR" sz="1000" b="0" i="0" u="none" strike="noStrike" kern="1200" cap="none" normalizeH="0" baseline="0" dirty="0" smtClean="0">
                           <a:ln>
                             <a:noFill/>
                           </a:ln>
@@ -17778,7 +17826,7 @@
                         <a:t>   - SWE. 1, 2, 3 </a:t>
                       </a:r>
                       <a:r>
-                        <a:rPr kumimoji="1" lang="ko-KR" altLang="en-US" sz="1000" b="0" i="0" u="none" strike="noStrike" kern="1200" cap="none" normalizeH="0" baseline="0" smtClean="0">
+                        <a:rPr kumimoji="1" lang="ko-KR" altLang="en-US" sz="1000" b="0" i="0" u="none" strike="noStrike" kern="1200" cap="none" normalizeH="0" baseline="0" dirty="0" smtClean="0">
                           <a:ln>
                             <a:noFill/>
                           </a:ln>
@@ -17790,10 +17838,56 @@
                           <a:ea typeface="+mn-ea"/>
                           <a:cs typeface="+mn-cs"/>
                         </a:rPr>
-                        <a:t>산출물 작성 및 검토</a:t>
+                        <a:t>산출물 작성 및 </a:t>
                       </a:r>
                       <a:r>
-                        <a:rPr kumimoji="1" lang="en-US" altLang="ko-KR" sz="1000" b="0" i="0" u="none" strike="noStrike" kern="1200" cap="none" normalizeH="0" baseline="0" smtClean="0">
+                        <a:rPr kumimoji="1" lang="ko-KR" altLang="en-US" sz="1000" b="0" i="0" u="none" strike="noStrike" kern="1200" cap="none" normalizeH="0" baseline="0" dirty="0" smtClean="0">
+                          <a:ln>
+                            <a:noFill/>
+                          </a:ln>
+                          <a:solidFill>
+                            <a:schemeClr val="tx1"/>
+                          </a:solidFill>
+                          <a:effectLst/>
+                          <a:latin typeface="+mn-lt"/>
+                          <a:ea typeface="+mn-ea"/>
+                          <a:cs typeface="+mn-cs"/>
+                        </a:rPr>
+                        <a:t>검토 </a:t>
+                      </a:r>
+                      <a:r>
+                        <a:rPr kumimoji="1" lang="en-US" altLang="ko-KR" sz="1000" b="0" i="0" u="none" strike="noStrike" kern="1200" cap="none" normalizeH="0" baseline="0" dirty="0" smtClean="0">
+                          <a:ln>
+                            <a:noFill/>
+                          </a:ln>
+                          <a:solidFill>
+                            <a:schemeClr val="tx1"/>
+                          </a:solidFill>
+                          <a:effectLst/>
+                          <a:latin typeface="+mn-lt"/>
+                          <a:ea typeface="+mn-ea"/>
+                          <a:cs typeface="+mn-cs"/>
+                        </a:rPr>
+                        <a:t>(80% </a:t>
+                      </a:r>
+                      <a:r>
+                        <a:rPr kumimoji="1" lang="en-US" altLang="ko-KR" sz="1000" b="0" i="0" u="none" strike="noStrike" kern="1200" cap="none" normalizeH="0" baseline="0" dirty="0" smtClean="0">
+                          <a:ln>
+                            <a:noFill/>
+                          </a:ln>
+                          <a:solidFill>
+                            <a:schemeClr val="tx1"/>
+                          </a:solidFill>
+                          <a:effectLst/>
+                          <a:latin typeface="+mn-lt"/>
+                          <a:ea typeface="+mn-ea"/>
+                          <a:cs typeface="+mn-cs"/>
+                          <a:sym typeface="Wingdings" panose="05000000000000000000" pitchFamily="2" charset="2"/>
+                        </a:rPr>
+                        <a:t> 90%)</a:t>
+                      </a:r>
+                      <a:r>
+                        <a:rPr kumimoji="1" lang="en-US" altLang="ko-KR" sz="1000" b="0" i="0" u="none" strike="noStrike" kern="1200" cap="none" normalizeH="0" baseline="0" dirty="0" smtClean="0">
                           <a:ln>
                             <a:noFill/>
                           </a:ln>
@@ -17808,7 +17902,7 @@
                         <a:t/>
                       </a:r>
                       <a:br>
-                        <a:rPr kumimoji="1" lang="en-US" altLang="ko-KR" sz="1000" b="0" i="0" u="none" strike="noStrike" kern="1200" cap="none" normalizeH="0" baseline="0" smtClean="0">
+                        <a:rPr kumimoji="1" lang="en-US" altLang="ko-KR" sz="1000" b="0" i="0" u="none" strike="noStrike" kern="1200" cap="none" normalizeH="0" baseline="0" dirty="0" smtClean="0">
                           <a:ln>
                             <a:noFill/>
                           </a:ln>
@@ -17822,7 +17916,7 @@
                         </a:rPr>
                       </a:br>
                       <a:r>
-                        <a:rPr kumimoji="1" lang="en-US" altLang="ko-KR" sz="1000" b="0" i="0" u="none" strike="noStrike" kern="1200" cap="none" normalizeH="0" baseline="0" smtClean="0">
+                        <a:rPr kumimoji="1" lang="en-US" altLang="ko-KR" sz="1000" b="0" i="0" u="none" strike="noStrike" kern="1200" cap="none" normalizeH="0" baseline="0" dirty="0" smtClean="0">
                           <a:ln>
                             <a:noFill/>
                           </a:ln>
@@ -17834,10 +17928,40 @@
                           <a:ea typeface="+mn-ea"/>
                           <a:cs typeface="+mn-cs"/>
                         </a:rPr>
-                        <a:t>   - SW Unit Test Case Specification (80% </a:t>
+                        <a:t>   - SW Unit Test Case Specification </a:t>
                       </a:r>
                       <a:r>
-                        <a:rPr kumimoji="1" lang="en-US" altLang="ko-KR" sz="1000" b="0" i="0" u="none" strike="noStrike" kern="1200" cap="none" normalizeH="0" baseline="0" smtClean="0">
+                        <a:rPr kumimoji="1" lang="en-US" altLang="ko-KR" sz="1000" b="0" i="0" u="none" strike="noStrike" kern="1200" cap="none" normalizeH="0" baseline="0" dirty="0" smtClean="0">
+                          <a:ln>
+                            <a:noFill/>
+                          </a:ln>
+                          <a:solidFill>
+                            <a:schemeClr val="tx1"/>
+                          </a:solidFill>
+                          <a:effectLst/>
+                          <a:latin typeface="+mn-lt"/>
+                          <a:ea typeface="+mn-ea"/>
+                          <a:cs typeface="+mn-cs"/>
+                        </a:rPr>
+                        <a:t>(90</a:t>
+                      </a:r>
+                      <a:r>
+                        <a:rPr kumimoji="1" lang="en-US" altLang="ko-KR" sz="1000" b="0" i="0" u="none" strike="noStrike" kern="1200" cap="none" normalizeH="0" baseline="0" dirty="0" smtClean="0">
+                          <a:ln>
+                            <a:noFill/>
+                          </a:ln>
+                          <a:solidFill>
+                            <a:schemeClr val="tx1"/>
+                          </a:solidFill>
+                          <a:effectLst/>
+                          <a:latin typeface="+mn-lt"/>
+                          <a:ea typeface="+mn-ea"/>
+                          <a:cs typeface="+mn-cs"/>
+                        </a:rPr>
+                        <a:t>% </a:t>
+                      </a:r>
+                      <a:r>
+                        <a:rPr kumimoji="1" lang="en-US" altLang="ko-KR" sz="1000" b="0" i="0" u="none" strike="noStrike" kern="1200" cap="none" normalizeH="0" baseline="0" dirty="0" smtClean="0">
                           <a:ln>
                             <a:noFill/>
                           </a:ln>
@@ -17850,10 +17974,42 @@
                           <a:cs typeface="+mn-cs"/>
                           <a:sym typeface="Wingdings" panose="05000000000000000000" pitchFamily="2" charset="2"/>
                         </a:rPr>
-                        <a:t> 90%)</a:t>
+                        <a:t> </a:t>
+                      </a:r>
+                      <a:r>
+                        <a:rPr kumimoji="1" lang="en-US" altLang="ko-KR" sz="1000" b="0" i="0" u="none" strike="noStrike" kern="1200" cap="none" normalizeH="0" baseline="0" dirty="0" smtClean="0">
+                          <a:ln>
+                            <a:noFill/>
+                          </a:ln>
+                          <a:solidFill>
+                            <a:schemeClr val="tx1"/>
+                          </a:solidFill>
+                          <a:effectLst/>
+                          <a:latin typeface="+mn-lt"/>
+                          <a:ea typeface="+mn-ea"/>
+                          <a:cs typeface="+mn-cs"/>
+                          <a:sym typeface="Wingdings" panose="05000000000000000000" pitchFamily="2" charset="2"/>
+                        </a:rPr>
+                        <a:t>100</a:t>
+                      </a:r>
+                      <a:r>
+                        <a:rPr kumimoji="1" lang="en-US" altLang="ko-KR" sz="1000" b="0" i="0" u="none" strike="noStrike" kern="1200" cap="none" normalizeH="0" baseline="0" dirty="0" smtClean="0">
+                          <a:ln>
+                            <a:noFill/>
+                          </a:ln>
+                          <a:solidFill>
+                            <a:schemeClr val="tx1"/>
+                          </a:solidFill>
+                          <a:effectLst/>
+                          <a:latin typeface="+mn-lt"/>
+                          <a:ea typeface="+mn-ea"/>
+                          <a:cs typeface="+mn-cs"/>
+                          <a:sym typeface="Wingdings" panose="05000000000000000000" pitchFamily="2" charset="2"/>
+                        </a:rPr>
+                        <a:t>%)</a:t>
                       </a:r>
                       <a:br>
-                        <a:rPr kumimoji="1" lang="en-US" altLang="ko-KR" sz="1000" b="0" i="0" u="none" strike="noStrike" kern="1200" cap="none" normalizeH="0" baseline="0" smtClean="0">
+                        <a:rPr kumimoji="1" lang="en-US" altLang="ko-KR" sz="1000" b="0" i="0" u="none" strike="noStrike" kern="1200" cap="none" normalizeH="0" baseline="0" dirty="0" smtClean="0">
                           <a:ln>
                             <a:noFill/>
                           </a:ln>
@@ -17868,7 +18024,7 @@
                         </a:rPr>
                       </a:br>
                       <a:r>
-                        <a:rPr kumimoji="1" lang="en-US" altLang="ko-KR" sz="1000" b="0" i="0" u="none" strike="noStrike" kern="1200" cap="none" normalizeH="0" baseline="0" smtClean="0">
+                        <a:rPr kumimoji="1" lang="en-US" altLang="ko-KR" sz="1000" b="0" i="0" u="none" strike="noStrike" kern="1200" cap="none" normalizeH="0" baseline="0" dirty="0" smtClean="0">
                           <a:ln>
                             <a:noFill/>
                           </a:ln>
@@ -17884,7 +18040,7 @@
                         <a:t>   - </a:t>
                       </a:r>
                       <a:r>
-                        <a:rPr kumimoji="1" lang="en-US" altLang="ko-KR" sz="1000" b="0" i="0" u="none" strike="noStrike" kern="1200" cap="none" normalizeH="0" baseline="0" smtClean="0">
+                        <a:rPr kumimoji="1" lang="en-US" altLang="ko-KR" sz="1000" b="0" i="0" u="none" strike="noStrike" kern="1200" cap="none" normalizeH="0" baseline="0" dirty="0" smtClean="0">
                           <a:ln>
                             <a:noFill/>
                           </a:ln>
@@ -17896,10 +18052,40 @@
                           <a:ea typeface="+mn-ea"/>
                           <a:cs typeface="+mn-cs"/>
                         </a:rPr>
-                        <a:t>SW Integration Test Case Specification (80% </a:t>
+                        <a:t>SW Integration Test Case Specification </a:t>
                       </a:r>
                       <a:r>
-                        <a:rPr kumimoji="1" lang="en-US" altLang="ko-KR" sz="1000" b="0" i="0" u="none" strike="noStrike" kern="1200" cap="none" normalizeH="0" baseline="0" smtClean="0">
+                        <a:rPr kumimoji="1" lang="en-US" altLang="ko-KR" sz="1000" b="0" i="0" u="none" strike="noStrike" kern="1200" cap="none" normalizeH="0" baseline="0" dirty="0" smtClean="0">
+                          <a:ln>
+                            <a:noFill/>
+                          </a:ln>
+                          <a:solidFill>
+                            <a:schemeClr val="tx1"/>
+                          </a:solidFill>
+                          <a:effectLst/>
+                          <a:latin typeface="+mn-lt"/>
+                          <a:ea typeface="+mn-ea"/>
+                          <a:cs typeface="+mn-cs"/>
+                        </a:rPr>
+                        <a:t>(90</a:t>
+                      </a:r>
+                      <a:r>
+                        <a:rPr kumimoji="1" lang="en-US" altLang="ko-KR" sz="1000" b="0" i="0" u="none" strike="noStrike" kern="1200" cap="none" normalizeH="0" baseline="0" dirty="0" smtClean="0">
+                          <a:ln>
+                            <a:noFill/>
+                          </a:ln>
+                          <a:solidFill>
+                            <a:schemeClr val="tx1"/>
+                          </a:solidFill>
+                          <a:effectLst/>
+                          <a:latin typeface="+mn-lt"/>
+                          <a:ea typeface="+mn-ea"/>
+                          <a:cs typeface="+mn-cs"/>
+                        </a:rPr>
+                        <a:t>% </a:t>
+                      </a:r>
+                      <a:r>
+                        <a:rPr kumimoji="1" lang="en-US" altLang="ko-KR" sz="1000" b="0" i="0" u="none" strike="noStrike" kern="1200" cap="none" normalizeH="0" baseline="0" dirty="0" smtClean="0">
                           <a:ln>
                             <a:noFill/>
                           </a:ln>
@@ -17912,9 +18098,87 @@
                           <a:cs typeface="+mn-cs"/>
                           <a:sym typeface="Wingdings" panose="05000000000000000000" pitchFamily="2" charset="2"/>
                         </a:rPr>
-                        <a:t> 90%)</a:t>
+                        <a:t> </a:t>
                       </a:r>
-                      <a:endParaRPr kumimoji="1" lang="en-US" altLang="ko-KR" sz="1000" b="0" i="0" u="none" strike="noStrike" kern="1200" cap="none" normalizeH="0" baseline="0" smtClean="0">
+                      <a:r>
+                        <a:rPr kumimoji="1" lang="en-US" altLang="ko-KR" sz="1000" b="0" i="0" u="none" strike="noStrike" kern="1200" cap="none" normalizeH="0" baseline="0" dirty="0" smtClean="0">
+                          <a:ln>
+                            <a:noFill/>
+                          </a:ln>
+                          <a:solidFill>
+                            <a:schemeClr val="tx1"/>
+                          </a:solidFill>
+                          <a:effectLst/>
+                          <a:latin typeface="+mn-lt"/>
+                          <a:ea typeface="+mn-ea"/>
+                          <a:cs typeface="+mn-cs"/>
+                          <a:sym typeface="Wingdings" panose="05000000000000000000" pitchFamily="2" charset="2"/>
+                        </a:rPr>
+                        <a:t>95%)</a:t>
+                      </a:r>
+                      <a:br>
+                        <a:rPr kumimoji="1" lang="en-US" altLang="ko-KR" sz="1000" b="0" i="0" u="none" strike="noStrike" kern="1200" cap="none" normalizeH="0" baseline="0" dirty="0" smtClean="0">
+                          <a:ln>
+                            <a:noFill/>
+                          </a:ln>
+                          <a:solidFill>
+                            <a:schemeClr val="tx1"/>
+                          </a:solidFill>
+                          <a:effectLst/>
+                          <a:latin typeface="+mn-lt"/>
+                          <a:ea typeface="+mn-ea"/>
+                          <a:cs typeface="+mn-cs"/>
+                          <a:sym typeface="Wingdings" panose="05000000000000000000" pitchFamily="2" charset="2"/>
+                        </a:rPr>
+                      </a:br>
+                      <a:r>
+                        <a:rPr kumimoji="1" lang="en-US" altLang="ko-KR" sz="1000" b="0" i="0" u="none" strike="noStrike" kern="1200" cap="none" normalizeH="0" baseline="0" dirty="0" smtClean="0">
+                          <a:ln>
+                            <a:noFill/>
+                          </a:ln>
+                          <a:solidFill>
+                            <a:schemeClr val="tx1"/>
+                          </a:solidFill>
+                          <a:effectLst/>
+                          <a:latin typeface="+mn-lt"/>
+                          <a:ea typeface="+mn-ea"/>
+                          <a:cs typeface="+mn-cs"/>
+                          <a:sym typeface="Wingdings" panose="05000000000000000000" pitchFamily="2" charset="2"/>
+                        </a:rPr>
+                        <a:t>   - SW Qualification Test Case Specification (</a:t>
+                      </a:r>
+                      <a:r>
+                        <a:rPr kumimoji="1" lang="en-US" altLang="ko-KR" sz="1000" b="0" i="0" u="none" strike="noStrike" kern="1200" cap="none" normalizeH="0" baseline="0" dirty="0" smtClean="0">
+                          <a:ln>
+                            <a:noFill/>
+                          </a:ln>
+                          <a:solidFill>
+                            <a:schemeClr val="tx1"/>
+                          </a:solidFill>
+                          <a:effectLst/>
+                          <a:latin typeface="+mn-lt"/>
+                          <a:ea typeface="+mn-ea"/>
+                          <a:cs typeface="+mn-cs"/>
+                        </a:rPr>
+                        <a:t>70% </a:t>
+                      </a:r>
+                      <a:r>
+                        <a:rPr kumimoji="1" lang="en-US" altLang="ko-KR" sz="1000" b="0" i="0" u="none" strike="noStrike" kern="1200" cap="none" normalizeH="0" baseline="0" dirty="0" smtClean="0">
+                          <a:ln>
+                            <a:noFill/>
+                          </a:ln>
+                          <a:solidFill>
+                            <a:schemeClr val="tx1"/>
+                          </a:solidFill>
+                          <a:effectLst/>
+                          <a:latin typeface="+mn-lt"/>
+                          <a:ea typeface="+mn-ea"/>
+                          <a:cs typeface="+mn-cs"/>
+                          <a:sym typeface="Wingdings" panose="05000000000000000000" pitchFamily="2" charset="2"/>
+                        </a:rPr>
+                        <a:t> 75%)</a:t>
+                      </a:r>
+                      <a:endParaRPr kumimoji="1" lang="en-US" altLang="ko-KR" sz="1000" b="0" i="0" u="none" strike="noStrike" kern="1200" cap="none" normalizeH="0" baseline="0" dirty="0" smtClean="0">
                         <a:ln>
                           <a:noFill/>
                         </a:ln>
@@ -17948,7 +18212,7 @@
                         <a:defRPr/>
                       </a:pPr>
                       <a:r>
-                        <a:rPr kumimoji="1" lang="en-US" altLang="ko-KR" sz="1000" b="0" i="0" u="none" strike="noStrike" kern="1200" cap="none" normalizeH="0" baseline="0" smtClean="0">
+                        <a:rPr kumimoji="1" lang="en-US" altLang="ko-KR" sz="1000" b="0" i="0" u="none" strike="noStrike" kern="1200" cap="none" normalizeH="0" baseline="0" dirty="0" smtClean="0">
                           <a:ln>
                             <a:noFill/>
                           </a:ln>
@@ -17963,7 +18227,7 @@
                         <a:t>   - SW Static Test </a:t>
                       </a:r>
                       <a:r>
-                        <a:rPr kumimoji="1" lang="ko-KR" altLang="en-US" sz="1000" b="0" i="0" u="none" strike="noStrike" kern="1200" cap="none" normalizeH="0" baseline="0" smtClean="0">
+                        <a:rPr kumimoji="1" lang="ko-KR" altLang="en-US" sz="1000" b="0" i="0" u="none" strike="noStrike" kern="1200" cap="none" normalizeH="0" baseline="0" dirty="0" smtClean="0">
                           <a:ln>
                             <a:noFill/>
                           </a:ln>
@@ -17975,9 +18239,98 @@
                           <a:ea typeface="+mn-ea"/>
                           <a:cs typeface="+mn-cs"/>
                         </a:rPr>
-                        <a:t>진행</a:t>
+                        <a:t>완료 및 </a:t>
                       </a:r>
-                      <a:endParaRPr kumimoji="1" lang="en-US" altLang="ko-KR" sz="1000" b="0" i="0" u="none" strike="noStrike" kern="1200" cap="none" normalizeH="0" baseline="0" smtClean="0">
+                      <a:r>
+                        <a:rPr kumimoji="1" lang="en-US" altLang="ko-KR" sz="1000" b="0" i="0" u="none" strike="noStrike" kern="1200" cap="none" normalizeH="0" baseline="0" dirty="0" smtClean="0">
+                          <a:ln>
+                            <a:noFill/>
+                          </a:ln>
+                          <a:solidFill>
+                            <a:schemeClr val="tx1"/>
+                          </a:solidFill>
+                          <a:effectLst/>
+                          <a:latin typeface="+mn-lt"/>
+                          <a:ea typeface="+mn-ea"/>
+                          <a:cs typeface="+mn-cs"/>
+                        </a:rPr>
+                        <a:t>Report </a:t>
+                      </a:r>
+                      <a:r>
+                        <a:rPr kumimoji="1" lang="ko-KR" altLang="en-US" sz="1000" b="0" i="0" u="none" strike="noStrike" kern="1200" cap="none" normalizeH="0" baseline="0" dirty="0" smtClean="0">
+                          <a:ln>
+                            <a:noFill/>
+                          </a:ln>
+                          <a:solidFill>
+                            <a:schemeClr val="tx1"/>
+                          </a:solidFill>
+                          <a:effectLst/>
+                          <a:latin typeface="+mn-lt"/>
+                          <a:ea typeface="+mn-ea"/>
+                          <a:cs typeface="+mn-cs"/>
+                        </a:rPr>
+                        <a:t>생성</a:t>
+                      </a:r>
+                      <a:r>
+                        <a:rPr kumimoji="1" lang="en-US" altLang="ko-KR" sz="1000" b="0" i="0" u="none" strike="noStrike" kern="1200" cap="none" normalizeH="0" baseline="0" dirty="0" smtClean="0">
+                          <a:ln>
+                            <a:noFill/>
+                          </a:ln>
+                          <a:solidFill>
+                            <a:schemeClr val="tx1"/>
+                          </a:solidFill>
+                          <a:effectLst/>
+                          <a:latin typeface="+mn-lt"/>
+                          <a:ea typeface="+mn-ea"/>
+                          <a:cs typeface="+mn-cs"/>
+                        </a:rPr>
+                        <a:t/>
+                      </a:r>
+                      <a:br>
+                        <a:rPr kumimoji="1" lang="en-US" altLang="ko-KR" sz="1000" b="0" i="0" u="none" strike="noStrike" kern="1200" cap="none" normalizeH="0" baseline="0" dirty="0" smtClean="0">
+                          <a:ln>
+                            <a:noFill/>
+                          </a:ln>
+                          <a:solidFill>
+                            <a:schemeClr val="tx1"/>
+                          </a:solidFill>
+                          <a:effectLst/>
+                          <a:latin typeface="+mn-lt"/>
+                          <a:ea typeface="+mn-ea"/>
+                          <a:cs typeface="+mn-cs"/>
+                        </a:rPr>
+                      </a:br>
+                      <a:r>
+                        <a:rPr kumimoji="1" lang="en-US" altLang="ko-KR" sz="1000" b="0" i="0" u="none" strike="noStrike" kern="1200" cap="none" normalizeH="0" baseline="0" dirty="0" smtClean="0">
+                          <a:ln>
+                            <a:noFill/>
+                          </a:ln>
+                          <a:solidFill>
+                            <a:schemeClr val="tx1"/>
+                          </a:solidFill>
+                          <a:effectLst/>
+                          <a:latin typeface="+mn-lt"/>
+                          <a:ea typeface="+mn-ea"/>
+                          <a:cs typeface="+mn-cs"/>
+                        </a:rPr>
+                        <a:t>   - SW Unit Test </a:t>
+                      </a:r>
+                      <a:r>
+                        <a:rPr kumimoji="1" lang="ko-KR" altLang="en-US" sz="1000" b="0" i="0" u="none" strike="noStrike" kern="1200" cap="none" normalizeH="0" baseline="0" dirty="0" smtClean="0">
+                          <a:ln>
+                            <a:noFill/>
+                          </a:ln>
+                          <a:solidFill>
+                            <a:schemeClr val="tx1"/>
+                          </a:solidFill>
+                          <a:effectLst/>
+                          <a:latin typeface="+mn-lt"/>
+                          <a:ea typeface="+mn-ea"/>
+                          <a:cs typeface="+mn-cs"/>
+                        </a:rPr>
+                        <a:t>수행</a:t>
+                      </a:r>
+                      <a:endParaRPr kumimoji="1" lang="en-US" altLang="ko-KR" sz="1000" b="0" i="0" u="none" strike="noStrike" kern="1200" cap="none" normalizeH="0" baseline="0" dirty="0" smtClean="0">
                         <a:ln>
                           <a:noFill/>
                         </a:ln>
@@ -18011,7 +18364,7 @@
                         <a:defRPr/>
                       </a:pPr>
                       <a:r>
-                        <a:rPr kumimoji="1" lang="en-US" altLang="ko-KR" sz="1000" b="0" i="0" u="none" strike="noStrike" kern="1200" cap="none" normalizeH="0" baseline="0" smtClean="0">
+                        <a:rPr kumimoji="1" lang="en-US" altLang="ko-KR" sz="1000" b="0" i="0" u="none" strike="noStrike" kern="1200" cap="none" normalizeH="0" baseline="0" dirty="0" smtClean="0">
                           <a:ln>
                             <a:noFill/>
                           </a:ln>
@@ -18026,7 +18379,7 @@
                         <a:t>   - </a:t>
                       </a:r>
                       <a:r>
-                        <a:rPr kumimoji="1" lang="ko-KR" altLang="en-US" sz="1000" b="0" i="0" u="none" strike="noStrike" kern="1200" cap="none" normalizeH="0" baseline="0" smtClean="0">
+                        <a:rPr kumimoji="1" lang="ko-KR" altLang="en-US" sz="1000" b="0" i="0" u="none" strike="noStrike" kern="1200" cap="none" normalizeH="0" baseline="0" dirty="0" err="1" smtClean="0">
                           <a:ln>
                             <a:noFill/>
                           </a:ln>
@@ -18038,10 +18391,25 @@
                           <a:ea typeface="+mn-ea"/>
                           <a:cs typeface="+mn-cs"/>
                         </a:rPr>
-                        <a:t>씨앤비스 </a:t>
+                        <a:t>씨앤비스</a:t>
                       </a:r>
                       <a:r>
-                        <a:rPr kumimoji="1" lang="en-US" altLang="ko-KR" sz="1000" b="0" i="0" u="none" strike="noStrike" kern="1200" cap="none" normalizeH="0" baseline="0" smtClean="0">
+                        <a:rPr kumimoji="1" lang="ko-KR" altLang="en-US" sz="1000" b="0" i="0" u="none" strike="noStrike" kern="1200" cap="none" normalizeH="0" baseline="0" dirty="0" smtClean="0">
+                          <a:ln>
+                            <a:noFill/>
+                          </a:ln>
+                          <a:solidFill>
+                            <a:schemeClr val="tx1"/>
+                          </a:solidFill>
+                          <a:effectLst/>
+                          <a:latin typeface="+mn-lt"/>
+                          <a:ea typeface="+mn-ea"/>
+                          <a:cs typeface="+mn-cs"/>
+                        </a:rPr>
+                        <a:t> </a:t>
+                      </a:r>
+                      <a:r>
+                        <a:rPr kumimoji="1" lang="en-US" altLang="ko-KR" sz="1000" b="0" i="0" u="none" strike="noStrike" kern="1200" cap="none" normalizeH="0" baseline="0" dirty="0" smtClean="0">
                           <a:ln>
                             <a:noFill/>
                           </a:ln>
@@ -18056,7 +18424,7 @@
                         <a:t>3</a:t>
                       </a:r>
                       <a:r>
-                        <a:rPr kumimoji="1" lang="ko-KR" altLang="en-US" sz="1000" b="0" i="0" u="none" strike="noStrike" kern="1200" cap="none" normalizeH="0" baseline="0" smtClean="0">
+                        <a:rPr kumimoji="1" lang="ko-KR" altLang="en-US" sz="1000" b="0" i="0" u="none" strike="noStrike" kern="1200" cap="none" normalizeH="0" baseline="0" dirty="0" smtClean="0">
                           <a:ln>
                             <a:noFill/>
                           </a:ln>
@@ -18068,10 +18436,10 @@
                           <a:ea typeface="+mn-ea"/>
                           <a:cs typeface="+mn-cs"/>
                         </a:rPr>
-                        <a:t>차 점검 </a:t>
+                        <a:t>차 </a:t>
                       </a:r>
                       <a:r>
-                        <a:rPr kumimoji="1" lang="en-US" altLang="ko-KR" sz="1000" b="0" i="0" u="none" strike="noStrike" kern="1200" cap="none" normalizeH="0" baseline="0" smtClean="0">
+                        <a:rPr kumimoji="1" lang="ko-KR" altLang="en-US" sz="1000" b="0" i="0" u="none" strike="noStrike" kern="1200" cap="none" normalizeH="0" baseline="0" dirty="0" smtClean="0">
                           <a:ln>
                             <a:noFill/>
                           </a:ln>
@@ -18083,7 +18451,67 @@
                           <a:ea typeface="+mn-ea"/>
                           <a:cs typeface="+mn-cs"/>
                         </a:rPr>
-                        <a:t>8/28</a:t>
+                        <a:t>점검 </a:t>
+                      </a:r>
+                      <a:r>
+                        <a:rPr kumimoji="1" lang="ko-KR" altLang="en-US" sz="1000" b="0" i="0" u="none" strike="noStrike" kern="1200" cap="none" normalizeH="0" baseline="0" dirty="0" err="1" smtClean="0">
+                          <a:ln>
+                            <a:noFill/>
+                          </a:ln>
+                          <a:solidFill>
+                            <a:schemeClr val="tx1"/>
+                          </a:solidFill>
+                          <a:effectLst/>
+                          <a:latin typeface="+mn-lt"/>
+                          <a:ea typeface="+mn-ea"/>
+                          <a:cs typeface="+mn-cs"/>
+                        </a:rPr>
+                        <a:t>보완내용</a:t>
+                      </a:r>
+                      <a:r>
+                        <a:rPr kumimoji="1" lang="ko-KR" altLang="en-US" sz="1000" b="0" i="0" u="none" strike="noStrike" kern="1200" cap="none" normalizeH="0" baseline="0" dirty="0" smtClean="0">
+                          <a:ln>
+                            <a:noFill/>
+                          </a:ln>
+                          <a:solidFill>
+                            <a:schemeClr val="tx1"/>
+                          </a:solidFill>
+                          <a:effectLst/>
+                          <a:latin typeface="+mn-lt"/>
+                          <a:ea typeface="+mn-ea"/>
+                          <a:cs typeface="+mn-cs"/>
+                        </a:rPr>
+                        <a:t> </a:t>
+                      </a:r>
+                      <a:r>
+                        <a:rPr kumimoji="1" lang="ko-KR" altLang="en-US" sz="1000" b="0" i="0" u="sng" strike="noStrike" kern="1200" cap="none" normalizeH="0" baseline="0" dirty="0" smtClean="0">
+                          <a:ln>
+                            <a:noFill/>
+                          </a:ln>
+                          <a:solidFill>
+                            <a:schemeClr val="tx1"/>
+                          </a:solidFill>
+                          <a:effectLst/>
+                          <a:latin typeface="+mn-lt"/>
+                          <a:ea typeface="+mn-ea"/>
+                          <a:cs typeface="+mn-cs"/>
+                        </a:rPr>
+                        <a:t>수</a:t>
+                      </a:r>
+                      <a:r>
+                        <a:rPr kumimoji="1" lang="ko-KR" altLang="en-US" sz="1000" b="0" i="0" u="none" strike="noStrike" kern="1200" cap="none" normalizeH="0" baseline="0" dirty="0" smtClean="0">
+                          <a:ln>
+                            <a:noFill/>
+                          </a:ln>
+                          <a:solidFill>
+                            <a:schemeClr val="tx1"/>
+                          </a:solidFill>
+                          <a:effectLst/>
+                          <a:latin typeface="+mn-lt"/>
+                          <a:ea typeface="+mn-ea"/>
+                          <a:cs typeface="+mn-cs"/>
+                        </a:rPr>
+                        <a:t>정</a:t>
                       </a:r>
                       <a:endParaRPr kumimoji="1" lang="en-US" altLang="ko-KR" sz="1000" b="0" i="0" u="none" strike="noStrike" kern="1200" cap="none" normalizeH="0" baseline="0" dirty="0" smtClean="0">
                         <a:ln>
@@ -18197,7 +18625,22 @@
                           <a:ea typeface="+mn-ea"/>
                           <a:cs typeface="+mn-cs"/>
                         </a:rPr>
-                        <a:t>육성 프로젝트 진행</a:t>
+                        <a:t>육성 프로젝트 </a:t>
+                      </a:r>
+                      <a:r>
+                        <a:rPr kumimoji="1" lang="ko-KR" altLang="en-US" sz="1000" b="0" i="0" u="none" strike="noStrike" kern="1200" cap="none" normalizeH="0" baseline="0" dirty="0" smtClean="0">
+                          <a:ln>
+                            <a:noFill/>
+                          </a:ln>
+                          <a:solidFill>
+                            <a:schemeClr val="tx1"/>
+                          </a:solidFill>
+                          <a:effectLst/>
+                          <a:latin typeface="+mn-lt"/>
+                          <a:ea typeface="+mn-ea"/>
+                          <a:cs typeface="+mn-cs"/>
+                        </a:rPr>
+                        <a:t>진행</a:t>
                       </a:r>
                       <a:r>
                         <a:rPr kumimoji="1" lang="en-US" altLang="ko-KR" sz="1000" b="0" i="0" u="none" strike="noStrike" kern="1200" cap="none" normalizeH="0" baseline="0" dirty="0" smtClean="0">
@@ -18229,7 +18672,7 @@
                         </a:rPr>
                       </a:br>
                       <a:r>
-                        <a:rPr kumimoji="1" lang="en-US" altLang="ko-KR" sz="1000" b="0" i="0" u="none" strike="noStrike" kern="1200" cap="none" normalizeH="0" baseline="0" smtClean="0">
+                        <a:rPr kumimoji="1" lang="en-US" altLang="ko-KR" sz="1000" b="0" i="0" u="none" strike="noStrike" kern="1200" cap="none" normalizeH="0" baseline="0" dirty="0" smtClean="0">
                           <a:ln>
                             <a:noFill/>
                           </a:ln>
@@ -18242,6 +18685,392 @@
                           <a:cs typeface="+mn-cs"/>
                         </a:rPr>
                         <a:t> </a:t>
+                      </a:r>
+                      <a:r>
+                        <a:rPr kumimoji="1" lang="en-US" altLang="ko-KR" sz="1000" b="0" i="0" u="none" strike="noStrike" kern="1200" cap="none" normalizeH="0" baseline="0" dirty="0" smtClean="0">
+                          <a:ln>
+                            <a:noFill/>
+                          </a:ln>
+                          <a:solidFill>
+                            <a:schemeClr val="tx1"/>
+                          </a:solidFill>
+                          <a:effectLst/>
+                          <a:latin typeface="+mn-lt"/>
+                          <a:ea typeface="+mn-ea"/>
+                          <a:cs typeface="+mn-cs"/>
+                        </a:rPr>
+                        <a:t> - Code Review </a:t>
+                      </a:r>
+                      <a:r>
+                        <a:rPr kumimoji="1" lang="ko-KR" altLang="en-US" sz="1000" b="0" i="0" u="none" strike="noStrike" kern="1200" cap="none" normalizeH="0" baseline="0" dirty="0" smtClean="0">
+                          <a:ln>
+                            <a:noFill/>
+                          </a:ln>
+                          <a:solidFill>
+                            <a:schemeClr val="tx1"/>
+                          </a:solidFill>
+                          <a:effectLst/>
+                          <a:latin typeface="+mn-lt"/>
+                          <a:ea typeface="+mn-ea"/>
+                          <a:cs typeface="+mn-cs"/>
+                        </a:rPr>
+                        <a:t>진행 후 </a:t>
+                      </a:r>
+                      <a:r>
+                        <a:rPr kumimoji="1" lang="en-US" altLang="ko-KR" sz="1000" b="0" i="0" u="none" strike="noStrike" kern="1200" cap="none" normalizeH="0" baseline="0" dirty="0" smtClean="0">
+                          <a:ln>
+                            <a:noFill/>
+                          </a:ln>
+                          <a:solidFill>
+                            <a:schemeClr val="tx1"/>
+                          </a:solidFill>
+                          <a:effectLst/>
+                          <a:latin typeface="+mn-lt"/>
+                          <a:ea typeface="+mn-ea"/>
+                          <a:cs typeface="+mn-cs"/>
+                        </a:rPr>
+                        <a:t>Review Report </a:t>
+                      </a:r>
+                      <a:r>
+                        <a:rPr kumimoji="1" lang="ko-KR" altLang="en-US" sz="1000" b="0" i="0" u="none" strike="noStrike" kern="1200" cap="none" normalizeH="0" baseline="0" dirty="0" smtClean="0">
+                          <a:ln>
+                            <a:noFill/>
+                          </a:ln>
+                          <a:solidFill>
+                            <a:schemeClr val="tx1"/>
+                          </a:solidFill>
+                          <a:effectLst/>
+                          <a:latin typeface="+mn-lt"/>
+                          <a:ea typeface="+mn-ea"/>
+                          <a:cs typeface="+mn-cs"/>
+                        </a:rPr>
+                        <a:t>작성</a:t>
+                      </a:r>
+                      <a:r>
+                        <a:rPr kumimoji="1" lang="en-US" altLang="ko-KR" sz="1000" b="0" i="0" u="none" strike="noStrike" kern="1200" cap="none" normalizeH="0" baseline="0" dirty="0" smtClean="0">
+                          <a:ln>
+                            <a:noFill/>
+                          </a:ln>
+                          <a:solidFill>
+                            <a:schemeClr val="tx1"/>
+                          </a:solidFill>
+                          <a:effectLst/>
+                          <a:latin typeface="+mn-lt"/>
+                          <a:ea typeface="+mn-ea"/>
+                          <a:cs typeface="+mn-cs"/>
+                        </a:rPr>
+                        <a:t/>
+                      </a:r>
+                      <a:br>
+                        <a:rPr kumimoji="1" lang="en-US" altLang="ko-KR" sz="1000" b="0" i="0" u="none" strike="noStrike" kern="1200" cap="none" normalizeH="0" baseline="0" dirty="0" smtClean="0">
+                          <a:ln>
+                            <a:noFill/>
+                          </a:ln>
+                          <a:solidFill>
+                            <a:schemeClr val="tx1"/>
+                          </a:solidFill>
+                          <a:effectLst/>
+                          <a:latin typeface="+mn-lt"/>
+                          <a:ea typeface="+mn-ea"/>
+                          <a:cs typeface="+mn-cs"/>
+                        </a:rPr>
+                      </a:br>
+                      <a:r>
+                        <a:rPr kumimoji="1" lang="en-US" altLang="ko-KR" sz="1000" b="0" i="0" u="none" strike="noStrike" kern="1200" cap="none" normalizeH="0" baseline="0" dirty="0" smtClean="0">
+                          <a:ln>
+                            <a:noFill/>
+                          </a:ln>
+                          <a:solidFill>
+                            <a:schemeClr val="tx1"/>
+                          </a:solidFill>
+                          <a:effectLst/>
+                          <a:latin typeface="+mn-lt"/>
+                          <a:ea typeface="+mn-ea"/>
+                          <a:cs typeface="+mn-cs"/>
+                        </a:rPr>
+                        <a:t>  - SW Static Analysis Report Review </a:t>
+                      </a:r>
+                      <a:r>
+                        <a:rPr kumimoji="1" lang="ko-KR" altLang="en-US" sz="1000" b="0" i="0" u="none" strike="noStrike" kern="1200" cap="none" normalizeH="0" baseline="0" dirty="0" smtClean="0">
+                          <a:ln>
+                            <a:noFill/>
+                          </a:ln>
+                          <a:solidFill>
+                            <a:schemeClr val="tx1"/>
+                          </a:solidFill>
+                          <a:effectLst/>
+                          <a:latin typeface="+mn-lt"/>
+                          <a:ea typeface="+mn-ea"/>
+                          <a:cs typeface="+mn-cs"/>
+                        </a:rPr>
+                        <a:t>실시 후 </a:t>
+                      </a:r>
+                      <a:r>
+                        <a:rPr kumimoji="1" lang="en-US" altLang="ko-KR" sz="1000" b="0" i="0" u="none" strike="noStrike" kern="1200" cap="none" normalizeH="0" baseline="0" dirty="0" smtClean="0">
+                          <a:ln>
+                            <a:noFill/>
+                          </a:ln>
+                          <a:solidFill>
+                            <a:schemeClr val="tx1"/>
+                          </a:solidFill>
+                          <a:effectLst/>
+                          <a:latin typeface="+mn-lt"/>
+                          <a:ea typeface="+mn-ea"/>
+                          <a:cs typeface="+mn-cs"/>
+                        </a:rPr>
+                        <a:t>Review Report </a:t>
+                      </a:r>
+                      <a:r>
+                        <a:rPr kumimoji="1" lang="ko-KR" altLang="en-US" sz="1000" b="0" i="0" u="none" strike="noStrike" kern="1200" cap="none" normalizeH="0" baseline="0" dirty="0" smtClean="0">
+                          <a:ln>
+                            <a:noFill/>
+                          </a:ln>
+                          <a:solidFill>
+                            <a:schemeClr val="tx1"/>
+                          </a:solidFill>
+                          <a:effectLst/>
+                          <a:latin typeface="+mn-lt"/>
+                          <a:ea typeface="+mn-ea"/>
+                          <a:cs typeface="+mn-cs"/>
+                        </a:rPr>
+                        <a:t>작성</a:t>
+                      </a:r>
+                      <a:r>
+                        <a:rPr kumimoji="1" lang="en-US" altLang="ko-KR" sz="1000" b="0" i="0" u="none" strike="noStrike" kern="1200" cap="none" normalizeH="0" baseline="0" dirty="0" smtClean="0">
+                          <a:ln>
+                            <a:noFill/>
+                          </a:ln>
+                          <a:solidFill>
+                            <a:schemeClr val="tx1"/>
+                          </a:solidFill>
+                          <a:effectLst/>
+                          <a:latin typeface="+mn-lt"/>
+                          <a:ea typeface="+mn-ea"/>
+                          <a:cs typeface="+mn-cs"/>
+                        </a:rPr>
+                        <a:t/>
+                      </a:r>
+                      <a:br>
+                        <a:rPr kumimoji="1" lang="en-US" altLang="ko-KR" sz="1000" b="0" i="0" u="none" strike="noStrike" kern="1200" cap="none" normalizeH="0" baseline="0" dirty="0" smtClean="0">
+                          <a:ln>
+                            <a:noFill/>
+                          </a:ln>
+                          <a:solidFill>
+                            <a:schemeClr val="tx1"/>
+                          </a:solidFill>
+                          <a:effectLst/>
+                          <a:latin typeface="+mn-lt"/>
+                          <a:ea typeface="+mn-ea"/>
+                          <a:cs typeface="+mn-cs"/>
+                        </a:rPr>
+                      </a:br>
+                      <a:r>
+                        <a:rPr kumimoji="1" lang="en-US" altLang="ko-KR" sz="1000" b="0" i="0" u="none" strike="noStrike" kern="1200" cap="none" normalizeH="0" baseline="0" dirty="0" smtClean="0">
+                          <a:ln>
+                            <a:noFill/>
+                          </a:ln>
+                          <a:solidFill>
+                            <a:schemeClr val="tx1"/>
+                          </a:solidFill>
+                          <a:effectLst/>
+                          <a:latin typeface="+mn-lt"/>
+                          <a:ea typeface="+mn-ea"/>
+                          <a:cs typeface="+mn-cs"/>
+                        </a:rPr>
+                        <a:t>  - SW Unit Test </a:t>
+                      </a:r>
+                      <a:r>
+                        <a:rPr kumimoji="1" lang="ko-KR" altLang="en-US" sz="1000" b="0" i="0" u="none" strike="noStrike" kern="1200" cap="none" normalizeH="0" baseline="0" dirty="0" smtClean="0">
+                          <a:ln>
+                            <a:noFill/>
+                          </a:ln>
+                          <a:solidFill>
+                            <a:schemeClr val="tx1"/>
+                          </a:solidFill>
+                          <a:effectLst/>
+                          <a:latin typeface="+mn-lt"/>
+                          <a:ea typeface="+mn-ea"/>
+                          <a:cs typeface="+mn-cs"/>
+                        </a:rPr>
+                        <a:t>완료 및 </a:t>
+                      </a:r>
+                      <a:r>
+                        <a:rPr kumimoji="1" lang="en-US" altLang="ko-KR" sz="1000" b="0" i="0" u="none" strike="noStrike" kern="1200" cap="none" normalizeH="0" baseline="0" dirty="0" smtClean="0">
+                          <a:ln>
+                            <a:noFill/>
+                          </a:ln>
+                          <a:solidFill>
+                            <a:schemeClr val="tx1"/>
+                          </a:solidFill>
+                          <a:effectLst/>
+                          <a:latin typeface="+mn-lt"/>
+                          <a:ea typeface="+mn-ea"/>
+                          <a:cs typeface="+mn-cs"/>
+                        </a:rPr>
+                        <a:t>Report </a:t>
+                      </a:r>
+                      <a:r>
+                        <a:rPr kumimoji="1" lang="ko-KR" altLang="en-US" sz="1000" b="0" i="0" u="none" strike="noStrike" kern="1200" cap="none" normalizeH="0" baseline="0" dirty="0" smtClean="0">
+                          <a:ln>
+                            <a:noFill/>
+                          </a:ln>
+                          <a:solidFill>
+                            <a:schemeClr val="tx1"/>
+                          </a:solidFill>
+                          <a:effectLst/>
+                          <a:latin typeface="+mn-lt"/>
+                          <a:ea typeface="+mn-ea"/>
+                          <a:cs typeface="+mn-cs"/>
+                        </a:rPr>
+                        <a:t>생성</a:t>
+                      </a:r>
+                      <a:r>
+                        <a:rPr kumimoji="1" lang="en-US" altLang="ko-KR" sz="1000" b="0" i="0" u="none" strike="noStrike" kern="1200" cap="none" normalizeH="0" baseline="0" dirty="0" smtClean="0">
+                          <a:ln>
+                            <a:noFill/>
+                          </a:ln>
+                          <a:solidFill>
+                            <a:schemeClr val="tx1"/>
+                          </a:solidFill>
+                          <a:effectLst/>
+                          <a:latin typeface="+mn-lt"/>
+                          <a:ea typeface="+mn-ea"/>
+                          <a:cs typeface="+mn-cs"/>
+                        </a:rPr>
+                        <a:t/>
+                      </a:r>
+                      <a:br>
+                        <a:rPr kumimoji="1" lang="en-US" altLang="ko-KR" sz="1000" b="0" i="0" u="none" strike="noStrike" kern="1200" cap="none" normalizeH="0" baseline="0" dirty="0" smtClean="0">
+                          <a:ln>
+                            <a:noFill/>
+                          </a:ln>
+                          <a:solidFill>
+                            <a:schemeClr val="tx1"/>
+                          </a:solidFill>
+                          <a:effectLst/>
+                          <a:latin typeface="+mn-lt"/>
+                          <a:ea typeface="+mn-ea"/>
+                          <a:cs typeface="+mn-cs"/>
+                        </a:rPr>
+                      </a:br>
+                      <a:r>
+                        <a:rPr kumimoji="1" lang="en-US" altLang="ko-KR" sz="1000" b="0" i="0" u="none" strike="noStrike" kern="1200" cap="none" normalizeH="0" baseline="0" dirty="0" smtClean="0">
+                          <a:ln>
+                            <a:noFill/>
+                          </a:ln>
+                          <a:solidFill>
+                            <a:schemeClr val="tx1"/>
+                          </a:solidFill>
+                          <a:effectLst/>
+                          <a:latin typeface="+mn-lt"/>
+                          <a:ea typeface="+mn-ea"/>
+                          <a:cs typeface="+mn-cs"/>
+                        </a:rPr>
+                        <a:t>  - SW Integration Test </a:t>
+                      </a:r>
+                      <a:r>
+                        <a:rPr kumimoji="1" lang="ko-KR" altLang="en-US" sz="1000" b="0" i="0" u="none" strike="noStrike" kern="1200" cap="none" normalizeH="0" baseline="0" dirty="0" smtClean="0">
+                          <a:ln>
+                            <a:noFill/>
+                          </a:ln>
+                          <a:solidFill>
+                            <a:schemeClr val="tx1"/>
+                          </a:solidFill>
+                          <a:effectLst/>
+                          <a:latin typeface="+mn-lt"/>
+                          <a:ea typeface="+mn-ea"/>
+                          <a:cs typeface="+mn-cs"/>
+                        </a:rPr>
+                        <a:t>수행</a:t>
+                      </a:r>
+                      <a:r>
+                        <a:rPr kumimoji="1" lang="en-US" altLang="ko-KR" sz="1000" b="0" i="0" u="none" strike="noStrike" kern="1200" cap="none" normalizeH="0" baseline="0" dirty="0" smtClean="0">
+                          <a:ln>
+                            <a:noFill/>
+                          </a:ln>
+                          <a:solidFill>
+                            <a:schemeClr val="tx1"/>
+                          </a:solidFill>
+                          <a:effectLst/>
+                          <a:latin typeface="+mn-lt"/>
+                          <a:ea typeface="+mn-ea"/>
+                          <a:cs typeface="+mn-cs"/>
+                        </a:rPr>
+                        <a:t/>
+                      </a:r>
+                      <a:br>
+                        <a:rPr kumimoji="1" lang="en-US" altLang="ko-KR" sz="1000" b="0" i="0" u="none" strike="noStrike" kern="1200" cap="none" normalizeH="0" baseline="0" dirty="0" smtClean="0">
+                          <a:ln>
+                            <a:noFill/>
+                          </a:ln>
+                          <a:solidFill>
+                            <a:schemeClr val="tx1"/>
+                          </a:solidFill>
+                          <a:effectLst/>
+                          <a:latin typeface="+mn-lt"/>
+                          <a:ea typeface="+mn-ea"/>
+                          <a:cs typeface="+mn-cs"/>
+                        </a:rPr>
+                      </a:br>
+                      <a:r>
+                        <a:rPr kumimoji="1" lang="en-US" altLang="ko-KR" sz="1000" b="0" i="0" u="none" strike="noStrike" kern="1200" cap="none" normalizeH="0" baseline="0" dirty="0" smtClean="0">
+                          <a:ln>
+                            <a:noFill/>
+                          </a:ln>
+                          <a:solidFill>
+                            <a:schemeClr val="tx1"/>
+                          </a:solidFill>
+                          <a:effectLst/>
+                          <a:latin typeface="+mn-lt"/>
+                          <a:ea typeface="+mn-ea"/>
+                          <a:cs typeface="+mn-cs"/>
+                        </a:rPr>
+                        <a:t>  - SWE. 1, 2, 3, 4, 5, 6 </a:t>
+                      </a:r>
+                      <a:r>
+                        <a:rPr kumimoji="1" lang="ko-KR" altLang="en-US" sz="1000" b="0" i="0" u="none" strike="noStrike" kern="1200" cap="none" normalizeH="0" baseline="0" dirty="0" smtClean="0">
+                          <a:ln>
+                            <a:noFill/>
+                          </a:ln>
+                          <a:solidFill>
+                            <a:schemeClr val="tx1"/>
+                          </a:solidFill>
+                          <a:effectLst/>
+                          <a:latin typeface="+mn-lt"/>
+                          <a:ea typeface="+mn-ea"/>
+                          <a:cs typeface="+mn-cs"/>
+                        </a:rPr>
+                        <a:t>순차적으로 </a:t>
+                      </a:r>
+                      <a:r>
+                        <a:rPr kumimoji="1" lang="en-US" altLang="ko-KR" sz="1000" b="0" i="0" u="none" strike="noStrike" kern="1200" cap="none" normalizeH="0" baseline="0" dirty="0" smtClean="0">
+                          <a:ln>
+                            <a:noFill/>
+                          </a:ln>
+                          <a:solidFill>
+                            <a:schemeClr val="tx1"/>
+                          </a:solidFill>
+                          <a:effectLst/>
+                          <a:latin typeface="+mn-lt"/>
+                          <a:ea typeface="+mn-ea"/>
+                          <a:cs typeface="+mn-cs"/>
+                        </a:rPr>
+                        <a:t>ALM </a:t>
+                      </a:r>
+                      <a:r>
+                        <a:rPr kumimoji="1" lang="ko-KR" altLang="en-US" sz="1000" b="0" i="0" u="none" strike="noStrike" kern="1200" cap="none" normalizeH="0" baseline="0" dirty="0" smtClean="0">
+                          <a:ln>
+                            <a:noFill/>
+                          </a:ln>
+                          <a:solidFill>
+                            <a:schemeClr val="tx1"/>
+                          </a:solidFill>
+                          <a:effectLst/>
+                          <a:latin typeface="+mn-lt"/>
+                          <a:ea typeface="+mn-ea"/>
+                          <a:cs typeface="+mn-cs"/>
+                        </a:rPr>
+                        <a:t>등록</a:t>
                       </a:r>
                       <a:endParaRPr kumimoji="1" lang="en-US" altLang="ko-KR" sz="1000" b="0" i="0" u="none" strike="noStrike" kern="1200" cap="none" normalizeH="0" baseline="0" dirty="0" smtClean="0">
                         <a:ln>
@@ -18456,7 +19285,7 @@
                         <a:tabLst/>
                         <a:defRPr/>
                       </a:pPr>
-                      <a:endParaRPr kumimoji="0" lang="en-US" altLang="ko-KR" sz="1000" b="0" i="0" u="none" strike="noStrike" kern="1200" cap="none" spc="0" normalizeH="0" baseline="0" noProof="0" smtClean="0">
+                      <a:endParaRPr kumimoji="0" lang="en-US" altLang="ko-KR" sz="1000" b="0" i="0" u="none" strike="noStrike" kern="1200" cap="none" spc="0" normalizeH="0" baseline="0" noProof="0" dirty="0" smtClean="0">
                         <a:ln>
                           <a:noFill/>
                         </a:ln>
@@ -18491,7 +19320,7 @@
                         <a:tabLst/>
                         <a:defRPr/>
                       </a:pPr>
-                      <a:endParaRPr kumimoji="0" lang="en-US" altLang="ko-KR" sz="1000" b="0" i="0" u="none" strike="noStrike" kern="1200" cap="none" spc="0" normalizeH="0" baseline="0" noProof="0" smtClean="0">
+                      <a:endParaRPr kumimoji="0" lang="en-US" altLang="ko-KR" sz="1000" b="0" i="0" u="none" strike="noStrike" kern="1200" cap="none" spc="0" normalizeH="0" baseline="0" noProof="0" dirty="0" smtClean="0">
                         <a:ln>
                           <a:noFill/>
                         </a:ln>
@@ -18526,7 +19355,7 @@
                         <a:tabLst/>
                         <a:defRPr/>
                       </a:pPr>
-                      <a:endParaRPr kumimoji="0" lang="en-US" altLang="ko-KR" sz="1000" b="0" i="0" u="none" strike="noStrike" kern="1200" cap="none" spc="0" normalizeH="0" baseline="0" noProof="0" smtClean="0">
+                      <a:endParaRPr kumimoji="0" lang="en-US" altLang="ko-KR" sz="1000" b="0" i="0" u="none" strike="noStrike" kern="1200" cap="none" spc="0" normalizeH="0" baseline="0" noProof="0" dirty="0" smtClean="0">
                         <a:ln>
                           <a:noFill/>
                         </a:ln>
@@ -20941,20 +21770,20 @@
           <p:nvPr>
             <p:extLst>
               <p:ext uri="{D42A27DB-BD31-4B8C-83A1-F6EECF244321}">
-                <p14:modId xmlns:p14="http://schemas.microsoft.com/office/powerpoint/2010/main" val="2615902972"/>
+                <p14:modId xmlns:p14="http://schemas.microsoft.com/office/powerpoint/2010/main" val="1262428122"/>
               </p:ext>
             </p:extLst>
           </p:nvPr>
         </p:nvGraphicFramePr>
         <p:xfrm>
-          <a:off x="3922621" y="3789040"/>
+          <a:off x="3797613" y="3501008"/>
           <a:ext cx="381000" cy="806450"/>
         </p:xfrm>
         <a:graphic>
           <a:graphicData uri="http://schemas.openxmlformats.org/presentationml/2006/ole">
             <mc:AlternateContent xmlns:mc="http://schemas.openxmlformats.org/markup-compatibility/2006">
               <mc:Choice xmlns:v="urn:schemas-microsoft-com:vml" Requires="v">
-                <p:oleObj spid="_x0000_s1121" name="워크시트" showAsIcon="1" r:id="rId4" imgW="380880" imgH="806400" progId="Excel.Sheet.12">
+                <p:oleObj spid="_x0000_s1124" name="워크시트" showAsIcon="1" r:id="rId4" imgW="380880" imgH="806400" progId="Excel.Sheet.12">
                   <p:embed/>
                 </p:oleObj>
               </mc:Choice>
@@ -20975,7 +21804,7 @@
                     </p:blipFill>
                     <p:spPr>
                       <a:xfrm>
-                        <a:off x="3922621" y="3789040"/>
+                        <a:off x="3797613" y="3501008"/>
                         <a:ext cx="381000" cy="806450"/>
                       </a:xfrm>
                       <a:prstGeom prst="rect">
@@ -21809,22 +22638,7 @@
                           <a:ea typeface="+mn-ea"/>
                           <a:cs typeface="+mn-cs"/>
                         </a:rPr>
-                        <a:t>   - </a:t>
-                      </a:r>
-                      <a:r>
-                        <a:rPr kumimoji="1" lang="en-US" altLang="ko-KR" sz="1000" b="0" i="0" u="none" strike="noStrike" kern="1200" cap="none" normalizeH="0" baseline="0" smtClean="0">
-                          <a:ln>
-                            <a:noFill/>
-                          </a:ln>
-                          <a:solidFill>
-                            <a:schemeClr val="tx1"/>
-                          </a:solidFill>
-                          <a:effectLst/>
-                          <a:latin typeface="+mn-lt"/>
-                          <a:ea typeface="+mn-ea"/>
-                          <a:cs typeface="+mn-cs"/>
-                        </a:rPr>
-                        <a:t>SVm </a:t>
+                        <a:t>   - SVm </a:t>
                       </a:r>
                       <a:r>
                         <a:rPr kumimoji="1" lang="ko-KR" altLang="en-US" sz="1000" b="0" i="0" u="none" strike="noStrike" kern="1200" cap="none" normalizeH="0" baseline="0" smtClean="0">
@@ -22040,22 +22854,7 @@
                           <a:ea typeface="+mn-ea"/>
                           <a:cs typeface="+mn-cs"/>
                         </a:rPr>
-                        <a:t>: </a:t>
-                      </a:r>
-                      <a:r>
-                        <a:rPr kumimoji="1" lang="en-US" altLang="ko-KR" sz="1000" b="0" i="0" u="none" strike="noStrike" kern="1200" cap="none" normalizeH="0" baseline="0" smtClean="0">
-                          <a:ln>
-                            <a:noFill/>
-                          </a:ln>
-                          <a:solidFill>
-                            <a:schemeClr val="tx1"/>
-                          </a:solidFill>
-                          <a:effectLst/>
-                          <a:latin typeface="+mn-lt"/>
-                          <a:ea typeface="+mn-ea"/>
-                          <a:cs typeface="+mn-cs"/>
-                        </a:rPr>
-                        <a:t>9/4</a:t>
+                        <a:t>: 9/4</a:t>
                       </a:r>
                       <a:r>
                         <a:rPr kumimoji="1" lang="ko-KR" altLang="en-US" sz="1000" b="0" i="0" u="none" strike="noStrike" kern="1200" cap="none" normalizeH="0" baseline="0" smtClean="0">
